--- a/chapter12/chapter12.pptx
+++ b/chapter12/chapter12.pptx
@@ -10007,10 +10007,12 @@
           </a:bodyPr>
           <a:lstStyle/>
           <a:p>
-            <a:pPr>
-              <a:spcAft>
-                <a:spcPts val="1000"/>
-              </a:spcAft>
+            <a:pPr lvl="0" marL="457200" indent="-228600">
+              <a:buFont typeface="Calibri"/>
+              <a:spcAft>
+                <a:spcPts val="1000"/>
+              </a:spcAft>
+              <a:buSzPct val="100000"/>
               <a:buChar char="•"/>
               <a:lnSpc>
                 <a:spcPts val="2200"/>
@@ -10027,10 +10029,12 @@
             </a:r>
           </a:p>
           <a:p>
-            <a:pPr>
-              <a:spcAft>
-                <a:spcPts val="1000"/>
-              </a:spcAft>
+            <a:pPr lvl="0" marL="457200" indent="-228600">
+              <a:buFont typeface="Calibri"/>
+              <a:spcAft>
+                <a:spcPts val="1000"/>
+              </a:spcAft>
+              <a:buSzPct val="100000"/>
               <a:buChar char="•"/>
               <a:lnSpc>
                 <a:spcPts val="2200"/>
@@ -10166,10 +10170,12 @@
           </a:bodyPr>
           <a:lstStyle/>
           <a:p>
-            <a:pPr>
-              <a:spcAft>
-                <a:spcPts val="1000"/>
-              </a:spcAft>
+            <a:pPr lvl="0" marL="457200" indent="-228600">
+              <a:buFont typeface="Calibri"/>
+              <a:spcAft>
+                <a:spcPts val="1000"/>
+              </a:spcAft>
+              <a:buSzPct val="100000"/>
               <a:buChar char="•"/>
               <a:lnSpc>
                 <a:spcPts val="2200"/>
@@ -10305,10 +10311,12 @@
           </a:bodyPr>
           <a:lstStyle/>
           <a:p>
-            <a:pPr>
-              <a:spcAft>
-                <a:spcPts val="1000"/>
-              </a:spcAft>
+            <a:pPr lvl="0" marL="457200" indent="-228600">
+              <a:buFont typeface="Calibri"/>
+              <a:spcAft>
+                <a:spcPts val="1000"/>
+              </a:spcAft>
+              <a:buSzPct val="100000"/>
               <a:buChar char="•"/>
               <a:lnSpc>
                 <a:spcPts val="2200"/>
@@ -10325,10 +10333,12 @@
             </a:r>
           </a:p>
           <a:p>
-            <a:pPr>
-              <a:spcAft>
-                <a:spcPts val="1000"/>
-              </a:spcAft>
+            <a:pPr lvl="0" marL="457200" indent="-228600">
+              <a:buFont typeface="Calibri"/>
+              <a:spcAft>
+                <a:spcPts val="1000"/>
+              </a:spcAft>
+              <a:buSzPct val="100000"/>
               <a:buChar char="•"/>
               <a:lnSpc>
                 <a:spcPts val="2200"/>
@@ -10345,10 +10355,12 @@
             </a:r>
           </a:p>
           <a:p>
-            <a:pPr>
-              <a:spcAft>
-                <a:spcPts val="1000"/>
-              </a:spcAft>
+            <a:pPr lvl="0" marL="457200" indent="-228600">
+              <a:buFont typeface="Calibri"/>
+              <a:spcAft>
+                <a:spcPts val="1000"/>
+              </a:spcAft>
+              <a:buSzPct val="100000"/>
               <a:buChar char="•"/>
               <a:lnSpc>
                 <a:spcPts val="2200"/>
@@ -10484,10 +10496,12 @@
           </a:bodyPr>
           <a:lstStyle/>
           <a:p>
-            <a:pPr>
-              <a:spcAft>
-                <a:spcPts val="1000"/>
-              </a:spcAft>
+            <a:pPr lvl="0" marL="457200" indent="-228600">
+              <a:buFont typeface="Calibri"/>
+              <a:spcAft>
+                <a:spcPts val="1000"/>
+              </a:spcAft>
+              <a:buSzPct val="100000"/>
               <a:buChar char="•"/>
               <a:lnSpc>
                 <a:spcPts val="2200"/>
@@ -10504,10 +10518,12 @@
             </a:r>
           </a:p>
           <a:p>
-            <a:pPr>
-              <a:spcAft>
-                <a:spcPts val="1000"/>
-              </a:spcAft>
+            <a:pPr lvl="0" marL="457200" indent="-228600">
+              <a:buFont typeface="Calibri"/>
+              <a:spcAft>
+                <a:spcPts val="1000"/>
+              </a:spcAft>
+              <a:buSzPct val="100000"/>
               <a:buChar char="•"/>
               <a:lnSpc>
                 <a:spcPts val="2200"/>
@@ -10643,10 +10659,12 @@
           </a:bodyPr>
           <a:lstStyle/>
           <a:p>
-            <a:pPr>
-              <a:spcAft>
-                <a:spcPts val="1000"/>
-              </a:spcAft>
+            <a:pPr lvl="0" marL="457200" indent="-228600">
+              <a:buFont typeface="Calibri"/>
+              <a:spcAft>
+                <a:spcPts val="1000"/>
+              </a:spcAft>
+              <a:buSzPct val="100000"/>
               <a:buChar char="•"/>
               <a:lnSpc>
                 <a:spcPts val="2200"/>
@@ -10663,10 +10681,12 @@
             </a:r>
           </a:p>
           <a:p>
-            <a:pPr>
-              <a:spcAft>
-                <a:spcPts val="1000"/>
-              </a:spcAft>
+            <a:pPr lvl="0" marL="457200" indent="-228600">
+              <a:buFont typeface="Calibri"/>
+              <a:spcAft>
+                <a:spcPts val="1000"/>
+              </a:spcAft>
+              <a:buSzPct val="100000"/>
               <a:buChar char="•"/>
               <a:lnSpc>
                 <a:spcPts val="2200"/>
@@ -10683,10 +10703,12 @@
             </a:r>
           </a:p>
           <a:p>
-            <a:pPr>
-              <a:spcAft>
-                <a:spcPts val="1000"/>
-              </a:spcAft>
+            <a:pPr lvl="0" marL="457200" indent="-228600">
+              <a:buFont typeface="Calibri"/>
+              <a:spcAft>
+                <a:spcPts val="1000"/>
+              </a:spcAft>
+              <a:buSzPct val="100000"/>
               <a:buChar char="•"/>
               <a:lnSpc>
                 <a:spcPts val="2200"/>
@@ -10822,10 +10844,12 @@
           </a:bodyPr>
           <a:lstStyle/>
           <a:p>
-            <a:pPr>
-              <a:spcAft>
-                <a:spcPts val="1000"/>
-              </a:spcAft>
+            <a:pPr lvl="0" marL="457200" indent="-228600">
+              <a:buFont typeface="Calibri"/>
+              <a:spcAft>
+                <a:spcPts val="1000"/>
+              </a:spcAft>
+              <a:buSzPct val="100000"/>
               <a:buChar char="•"/>
               <a:lnSpc>
                 <a:spcPts val="2200"/>
@@ -10842,10 +10866,12 @@
             </a:r>
           </a:p>
           <a:p>
-            <a:pPr>
-              <a:spcAft>
-                <a:spcPts val="1000"/>
-              </a:spcAft>
+            <a:pPr lvl="0" marL="457200" indent="-228600">
+              <a:buFont typeface="Calibri"/>
+              <a:spcAft>
+                <a:spcPts val="1000"/>
+              </a:spcAft>
+              <a:buSzPct val="100000"/>
               <a:buChar char="•"/>
               <a:lnSpc>
                 <a:spcPts val="2200"/>
@@ -10862,10 +10888,12 @@
             </a:r>
           </a:p>
           <a:p>
-            <a:pPr>
-              <a:spcAft>
-                <a:spcPts val="1000"/>
-              </a:spcAft>
+            <a:pPr lvl="0" marL="457200" indent="-228600">
+              <a:buFont typeface="Calibri"/>
+              <a:spcAft>
+                <a:spcPts val="1000"/>
+              </a:spcAft>
+              <a:buSzPct val="100000"/>
               <a:buChar char="•"/>
               <a:lnSpc>
                 <a:spcPts val="2200"/>
@@ -10882,10 +10910,12 @@
             </a:r>
           </a:p>
           <a:p>
-            <a:pPr>
-              <a:spcAft>
-                <a:spcPts val="1000"/>
-              </a:spcAft>
+            <a:pPr lvl="0" marL="457200" indent="-228600">
+              <a:buFont typeface="Calibri"/>
+              <a:spcAft>
+                <a:spcPts val="1000"/>
+              </a:spcAft>
+              <a:buSzPct val="100000"/>
               <a:buChar char="•"/>
               <a:lnSpc>
                 <a:spcPts val="2200"/>
@@ -10902,10 +10932,12 @@
             </a:r>
           </a:p>
           <a:p>
-            <a:pPr>
-              <a:spcAft>
-                <a:spcPts val="1000"/>
-              </a:spcAft>
+            <a:pPr lvl="0" marL="457200" indent="-228600">
+              <a:buFont typeface="Calibri"/>
+              <a:spcAft>
+                <a:spcPts val="1000"/>
+              </a:spcAft>
+              <a:buSzPct val="100000"/>
               <a:buChar char="•"/>
               <a:lnSpc>
                 <a:spcPts val="2200"/>
@@ -11041,10 +11073,12 @@
           </a:bodyPr>
           <a:lstStyle/>
           <a:p>
-            <a:pPr>
-              <a:spcAft>
-                <a:spcPts val="1000"/>
-              </a:spcAft>
+            <a:pPr lvl="0" marL="457200" indent="-228600">
+              <a:buFont typeface="Calibri"/>
+              <a:spcAft>
+                <a:spcPts val="1000"/>
+              </a:spcAft>
+              <a:buSzPct val="100000"/>
               <a:buChar char="•"/>
               <a:lnSpc>
                 <a:spcPts val="2200"/>
@@ -11061,10 +11095,12 @@
             </a:r>
           </a:p>
           <a:p>
-            <a:pPr>
-              <a:spcAft>
-                <a:spcPts val="1000"/>
-              </a:spcAft>
+            <a:pPr lvl="0" marL="457200" indent="-228600">
+              <a:buFont typeface="Calibri"/>
+              <a:spcAft>
+                <a:spcPts val="1000"/>
+              </a:spcAft>
+              <a:buSzPct val="100000"/>
               <a:buChar char="•"/>
               <a:lnSpc>
                 <a:spcPts val="2200"/>
@@ -11081,10 +11117,12 @@
             </a:r>
           </a:p>
           <a:p>
-            <a:pPr>
-              <a:spcAft>
-                <a:spcPts val="1000"/>
-              </a:spcAft>
+            <a:pPr lvl="0" marL="457200" indent="-228600">
+              <a:buFont typeface="Calibri"/>
+              <a:spcAft>
+                <a:spcPts val="1000"/>
+              </a:spcAft>
+              <a:buSzPct val="100000"/>
               <a:buChar char="•"/>
               <a:lnSpc>
                 <a:spcPts val="2200"/>
@@ -11220,10 +11258,12 @@
           </a:bodyPr>
           <a:lstStyle/>
           <a:p>
-            <a:pPr>
-              <a:spcAft>
-                <a:spcPts val="1000"/>
-              </a:spcAft>
+            <a:pPr lvl="0" marL="457200" indent="-228600">
+              <a:buFont typeface="Calibri"/>
+              <a:spcAft>
+                <a:spcPts val="1000"/>
+              </a:spcAft>
+              <a:buSzPct val="100000"/>
               <a:buChar char="•"/>
               <a:lnSpc>
                 <a:spcPts val="2200"/>
@@ -11240,10 +11280,12 @@
             </a:r>
           </a:p>
           <a:p>
-            <a:pPr>
-              <a:spcAft>
-                <a:spcPts val="1000"/>
-              </a:spcAft>
+            <a:pPr lvl="0" marL="457200" indent="-228600">
+              <a:buFont typeface="Calibri"/>
+              <a:spcAft>
+                <a:spcPts val="1000"/>
+              </a:spcAft>
+              <a:buSzPct val="100000"/>
               <a:buChar char="•"/>
               <a:lnSpc>
                 <a:spcPts val="2200"/>
@@ -11260,10 +11302,12 @@
             </a:r>
           </a:p>
           <a:p>
-            <a:pPr>
-              <a:spcAft>
-                <a:spcPts val="1000"/>
-              </a:spcAft>
+            <a:pPr lvl="0" marL="457200" indent="-228600">
+              <a:buFont typeface="Calibri"/>
+              <a:spcAft>
+                <a:spcPts val="1000"/>
+              </a:spcAft>
+              <a:buSzPct val="100000"/>
               <a:buChar char="•"/>
               <a:lnSpc>
                 <a:spcPts val="2200"/>
@@ -11280,10 +11324,12 @@
             </a:r>
           </a:p>
           <a:p>
-            <a:pPr>
-              <a:spcAft>
-                <a:spcPts val="1000"/>
-              </a:spcAft>
+            <a:pPr lvl="0" marL="457200" indent="-228600">
+              <a:buFont typeface="Calibri"/>
+              <a:spcAft>
+                <a:spcPts val="1000"/>
+              </a:spcAft>
+              <a:buSzPct val="100000"/>
               <a:buChar char="•"/>
               <a:lnSpc>
                 <a:spcPts val="2200"/>
@@ -11300,10 +11346,12 @@
             </a:r>
           </a:p>
           <a:p>
-            <a:pPr>
-              <a:spcAft>
-                <a:spcPts val="1000"/>
-              </a:spcAft>
+            <a:pPr lvl="0" marL="457200" indent="-228600">
+              <a:buFont typeface="Calibri"/>
+              <a:spcAft>
+                <a:spcPts val="1000"/>
+              </a:spcAft>
+              <a:buSzPct val="100000"/>
               <a:buChar char="•"/>
               <a:lnSpc>
                 <a:spcPts val="2200"/>
@@ -11439,10 +11487,12 @@
           </a:bodyPr>
           <a:lstStyle/>
           <a:p>
-            <a:pPr>
-              <a:spcAft>
-                <a:spcPts val="1000"/>
-              </a:spcAft>
+            <a:pPr lvl="0" marL="457200" indent="-228600">
+              <a:buFont typeface="Calibri"/>
+              <a:spcAft>
+                <a:spcPts val="1000"/>
+              </a:spcAft>
+              <a:buSzPct val="100000"/>
               <a:buChar char="•"/>
               <a:lnSpc>
                 <a:spcPts val="2200"/>
@@ -11459,10 +11509,12 @@
             </a:r>
           </a:p>
           <a:p>
-            <a:pPr>
-              <a:spcAft>
-                <a:spcPts val="1000"/>
-              </a:spcAft>
+            <a:pPr lvl="0" marL="457200" indent="-228600">
+              <a:buFont typeface="Calibri"/>
+              <a:spcAft>
+                <a:spcPts val="1000"/>
+              </a:spcAft>
+              <a:buSzPct val="100000"/>
               <a:buChar char="•"/>
               <a:lnSpc>
                 <a:spcPts val="2200"/>
@@ -11479,10 +11531,12 @@
             </a:r>
           </a:p>
           <a:p>
-            <a:pPr>
-              <a:spcAft>
-                <a:spcPts val="1000"/>
-              </a:spcAft>
+            <a:pPr lvl="0" marL="457200" indent="-228600">
+              <a:buFont typeface="Calibri"/>
+              <a:spcAft>
+                <a:spcPts val="1000"/>
+              </a:spcAft>
+              <a:buSzPct val="100000"/>
               <a:buChar char="•"/>
               <a:lnSpc>
                 <a:spcPts val="2200"/>
@@ -11618,10 +11672,12 @@
           </a:bodyPr>
           <a:lstStyle/>
           <a:p>
-            <a:pPr>
-              <a:spcAft>
-                <a:spcPts val="1000"/>
-              </a:spcAft>
+            <a:pPr lvl="0" marL="457200" indent="-228600">
+              <a:buFont typeface="Calibri"/>
+              <a:spcAft>
+                <a:spcPts val="1000"/>
+              </a:spcAft>
+              <a:buSzPct val="100000"/>
               <a:buChar char="•"/>
               <a:lnSpc>
                 <a:spcPts val="2200"/>
@@ -11638,10 +11694,12 @@
             </a:r>
           </a:p>
           <a:p>
-            <a:pPr>
-              <a:spcAft>
-                <a:spcPts val="1000"/>
-              </a:spcAft>
+            <a:pPr lvl="0" marL="457200" indent="-228600">
+              <a:buFont typeface="Calibri"/>
+              <a:spcAft>
+                <a:spcPts val="1000"/>
+              </a:spcAft>
+              <a:buSzPct val="100000"/>
               <a:buChar char="•"/>
               <a:lnSpc>
                 <a:spcPts val="2200"/>
@@ -11777,10 +11835,12 @@
           </a:bodyPr>
           <a:lstStyle/>
           <a:p>
-            <a:pPr>
-              <a:spcAft>
-                <a:spcPts val="1000"/>
-              </a:spcAft>
+            <a:pPr lvl="0" marL="457200" indent="-228600">
+              <a:buFont typeface="Calibri"/>
+              <a:spcAft>
+                <a:spcPts val="1000"/>
+              </a:spcAft>
+              <a:buSzPct val="100000"/>
               <a:buChar char="•"/>
               <a:lnSpc>
                 <a:spcPts val="2200"/>
@@ -11916,10 +11976,12 @@
           </a:bodyPr>
           <a:lstStyle/>
           <a:p>
-            <a:pPr>
-              <a:spcAft>
-                <a:spcPts val="1000"/>
-              </a:spcAft>
+            <a:pPr lvl="0" marL="457200" indent="-228600">
+              <a:buFont typeface="Calibri"/>
+              <a:spcAft>
+                <a:spcPts val="1000"/>
+              </a:spcAft>
+              <a:buSzPct val="100000"/>
               <a:buChar char="•"/>
               <a:lnSpc>
                 <a:spcPts val="2200"/>
@@ -12055,10 +12117,12 @@
           </a:bodyPr>
           <a:lstStyle/>
           <a:p>
-            <a:pPr>
-              <a:spcAft>
-                <a:spcPts val="1000"/>
-              </a:spcAft>
+            <a:pPr lvl="0" marL="457200" indent="-228600">
+              <a:buFont typeface="Calibri"/>
+              <a:spcAft>
+                <a:spcPts val="1000"/>
+              </a:spcAft>
+              <a:buSzPct val="100000"/>
               <a:buChar char="•"/>
               <a:lnSpc>
                 <a:spcPts val="2200"/>
@@ -12075,10 +12139,12 @@
             </a:r>
           </a:p>
           <a:p>
-            <a:pPr>
-              <a:spcAft>
-                <a:spcPts val="1000"/>
-              </a:spcAft>
+            <a:pPr lvl="0" marL="457200" indent="-228600">
+              <a:buFont typeface="Calibri"/>
+              <a:spcAft>
+                <a:spcPts val="1000"/>
+              </a:spcAft>
+              <a:buSzPct val="100000"/>
               <a:buChar char="•"/>
               <a:lnSpc>
                 <a:spcPts val="2200"/>
@@ -12214,10 +12280,12 @@
           </a:bodyPr>
           <a:lstStyle/>
           <a:p>
-            <a:pPr>
-              <a:spcAft>
-                <a:spcPts val="1000"/>
-              </a:spcAft>
+            <a:pPr lvl="0" marL="457200" indent="-228600">
+              <a:buFont typeface="Calibri"/>
+              <a:spcAft>
+                <a:spcPts val="1000"/>
+              </a:spcAft>
+              <a:buSzPct val="100000"/>
               <a:buChar char="•"/>
               <a:lnSpc>
                 <a:spcPts val="2200"/>
@@ -12234,10 +12302,12 @@
             </a:r>
           </a:p>
           <a:p>
-            <a:pPr>
-              <a:spcAft>
-                <a:spcPts val="1000"/>
-              </a:spcAft>
+            <a:pPr lvl="0" marL="457200" indent="-228600">
+              <a:buFont typeface="Calibri"/>
+              <a:spcAft>
+                <a:spcPts val="1000"/>
+              </a:spcAft>
+              <a:buSzPct val="100000"/>
               <a:buChar char="•"/>
               <a:lnSpc>
                 <a:spcPts val="2200"/>
@@ -12254,10 +12324,12 @@
             </a:r>
           </a:p>
           <a:p>
-            <a:pPr>
-              <a:spcAft>
-                <a:spcPts val="1000"/>
-              </a:spcAft>
+            <a:pPr lvl="0" marL="457200" indent="-228600">
+              <a:buFont typeface="Calibri"/>
+              <a:spcAft>
+                <a:spcPts val="1000"/>
+              </a:spcAft>
+              <a:buSzPct val="100000"/>
               <a:buChar char="•"/>
               <a:lnSpc>
                 <a:spcPts val="2200"/>
@@ -12274,10 +12346,12 @@
             </a:r>
           </a:p>
           <a:p>
-            <a:pPr>
-              <a:spcAft>
-                <a:spcPts val="1000"/>
-              </a:spcAft>
+            <a:pPr lvl="0" marL="457200" indent="-228600">
+              <a:buFont typeface="Calibri"/>
+              <a:spcAft>
+                <a:spcPts val="1000"/>
+              </a:spcAft>
+              <a:buSzPct val="100000"/>
               <a:buChar char="•"/>
               <a:lnSpc>
                 <a:spcPts val="2200"/>
@@ -12294,10 +12368,12 @@
             </a:r>
           </a:p>
           <a:p>
-            <a:pPr>
-              <a:spcAft>
-                <a:spcPts val="1000"/>
-              </a:spcAft>
+            <a:pPr lvl="0" marL="457200" indent="-228600">
+              <a:buFont typeface="Calibri"/>
+              <a:spcAft>
+                <a:spcPts val="1000"/>
+              </a:spcAft>
+              <a:buSzPct val="100000"/>
               <a:buChar char="•"/>
               <a:lnSpc>
                 <a:spcPts val="2200"/>
@@ -12433,10 +12509,12 @@
           </a:bodyPr>
           <a:lstStyle/>
           <a:p>
-            <a:pPr>
-              <a:spcAft>
-                <a:spcPts val="1000"/>
-              </a:spcAft>
+            <a:pPr lvl="0" marL="457200" indent="-228600">
+              <a:buFont typeface="Calibri"/>
+              <a:spcAft>
+                <a:spcPts val="1000"/>
+              </a:spcAft>
+              <a:buSzPct val="100000"/>
               <a:buChar char="•"/>
               <a:lnSpc>
                 <a:spcPts val="2200"/>
@@ -12453,10 +12531,12 @@
             </a:r>
           </a:p>
           <a:p>
-            <a:pPr>
-              <a:spcAft>
-                <a:spcPts val="1000"/>
-              </a:spcAft>
+            <a:pPr lvl="0" marL="457200" indent="-228600">
+              <a:buFont typeface="Calibri"/>
+              <a:spcAft>
+                <a:spcPts val="1000"/>
+              </a:spcAft>
+              <a:buSzPct val="100000"/>
               <a:buChar char="•"/>
               <a:lnSpc>
                 <a:spcPts val="2200"/>
@@ -12473,10 +12553,12 @@
             </a:r>
           </a:p>
           <a:p>
-            <a:pPr>
-              <a:spcAft>
-                <a:spcPts val="1000"/>
-              </a:spcAft>
+            <a:pPr lvl="0" marL="457200" indent="-228600">
+              <a:buFont typeface="Calibri"/>
+              <a:spcAft>
+                <a:spcPts val="1000"/>
+              </a:spcAft>
+              <a:buSzPct val="100000"/>
               <a:buChar char="•"/>
               <a:lnSpc>
                 <a:spcPts val="2200"/>
@@ -12493,10 +12575,12 @@
             </a:r>
           </a:p>
           <a:p>
-            <a:pPr>
-              <a:spcAft>
-                <a:spcPts val="1000"/>
-              </a:spcAft>
+            <a:pPr lvl="0" marL="457200" indent="-228600">
+              <a:buFont typeface="Calibri"/>
+              <a:spcAft>
+                <a:spcPts val="1000"/>
+              </a:spcAft>
+              <a:buSzPct val="100000"/>
               <a:buChar char="•"/>
               <a:lnSpc>
                 <a:spcPts val="2200"/>
@@ -12513,10 +12597,12 @@
             </a:r>
           </a:p>
           <a:p>
-            <a:pPr>
-              <a:spcAft>
-                <a:spcPts val="1000"/>
-              </a:spcAft>
+            <a:pPr lvl="0" marL="457200" indent="-228600">
+              <a:buFont typeface="Calibri"/>
+              <a:spcAft>
+                <a:spcPts val="1000"/>
+              </a:spcAft>
+              <a:buSzPct val="100000"/>
               <a:buChar char="•"/>
               <a:lnSpc>
                 <a:spcPts val="2200"/>
@@ -12652,10 +12738,12 @@
           </a:bodyPr>
           <a:lstStyle/>
           <a:p>
-            <a:pPr>
-              <a:spcAft>
-                <a:spcPts val="1000"/>
-              </a:spcAft>
+            <a:pPr lvl="0" marL="457200" indent="-228600">
+              <a:buFont typeface="Calibri"/>
+              <a:spcAft>
+                <a:spcPts val="1000"/>
+              </a:spcAft>
+              <a:buSzPct val="100000"/>
               <a:buChar char="•"/>
               <a:lnSpc>
                 <a:spcPts val="2200"/>
@@ -12672,10 +12760,12 @@
             </a:r>
           </a:p>
           <a:p>
-            <a:pPr>
-              <a:spcAft>
-                <a:spcPts val="1000"/>
-              </a:spcAft>
+            <a:pPr lvl="0" marL="457200" indent="-228600">
+              <a:buFont typeface="Calibri"/>
+              <a:spcAft>
+                <a:spcPts val="1000"/>
+              </a:spcAft>
+              <a:buSzPct val="100000"/>
               <a:buChar char="•"/>
               <a:lnSpc>
                 <a:spcPts val="2200"/>
@@ -12692,10 +12782,12 @@
             </a:r>
           </a:p>
           <a:p>
-            <a:pPr>
-              <a:spcAft>
-                <a:spcPts val="1000"/>
-              </a:spcAft>
+            <a:pPr lvl="0" marL="457200" indent="-228600">
+              <a:buFont typeface="Calibri"/>
+              <a:spcAft>
+                <a:spcPts val="1000"/>
+              </a:spcAft>
+              <a:buSzPct val="100000"/>
               <a:buChar char="•"/>
               <a:lnSpc>
                 <a:spcPts val="2200"/>
@@ -12831,10 +12923,12 @@
           </a:bodyPr>
           <a:lstStyle/>
           <a:p>
-            <a:pPr>
-              <a:spcAft>
-                <a:spcPts val="1000"/>
-              </a:spcAft>
+            <a:pPr lvl="0" marL="457200" indent="-228600">
+              <a:buFont typeface="Calibri"/>
+              <a:spcAft>
+                <a:spcPts val="1000"/>
+              </a:spcAft>
+              <a:buSzPct val="100000"/>
               <a:buChar char="•"/>
               <a:lnSpc>
                 <a:spcPts val="2200"/>
@@ -12851,10 +12945,12 @@
             </a:r>
           </a:p>
           <a:p>
-            <a:pPr>
-              <a:spcAft>
-                <a:spcPts val="1000"/>
-              </a:spcAft>
+            <a:pPr lvl="0" marL="457200" indent="-228600">
+              <a:buFont typeface="Calibri"/>
+              <a:spcAft>
+                <a:spcPts val="1000"/>
+              </a:spcAft>
+              <a:buSzPct val="100000"/>
               <a:buChar char="•"/>
               <a:lnSpc>
                 <a:spcPts val="2200"/>
@@ -12871,10 +12967,12 @@
             </a:r>
           </a:p>
           <a:p>
-            <a:pPr>
-              <a:spcAft>
-                <a:spcPts val="1000"/>
-              </a:spcAft>
+            <a:pPr lvl="0" marL="457200" indent="-228600">
+              <a:buFont typeface="Calibri"/>
+              <a:spcAft>
+                <a:spcPts val="1000"/>
+              </a:spcAft>
+              <a:buSzPct val="100000"/>
               <a:buChar char="•"/>
               <a:lnSpc>
                 <a:spcPts val="2200"/>
@@ -12891,10 +12989,12 @@
             </a:r>
           </a:p>
           <a:p>
-            <a:pPr>
-              <a:spcAft>
-                <a:spcPts val="1000"/>
-              </a:spcAft>
+            <a:pPr lvl="0" marL="457200" indent="-228600">
+              <a:buFont typeface="Calibri"/>
+              <a:spcAft>
+                <a:spcPts val="1000"/>
+              </a:spcAft>
+              <a:buSzPct val="100000"/>
               <a:buChar char="•"/>
               <a:lnSpc>
                 <a:spcPts val="2200"/>
@@ -12911,10 +13011,12 @@
             </a:r>
           </a:p>
           <a:p>
-            <a:pPr>
-              <a:spcAft>
-                <a:spcPts val="1000"/>
-              </a:spcAft>
+            <a:pPr lvl="0" marL="457200" indent="-228600">
+              <a:buFont typeface="Calibri"/>
+              <a:spcAft>
+                <a:spcPts val="1000"/>
+              </a:spcAft>
+              <a:buSzPct val="100000"/>
               <a:buChar char="•"/>
               <a:lnSpc>
                 <a:spcPts val="2200"/>
@@ -13050,10 +13152,12 @@
           </a:bodyPr>
           <a:lstStyle/>
           <a:p>
-            <a:pPr>
-              <a:spcAft>
-                <a:spcPts val="1000"/>
-              </a:spcAft>
+            <a:pPr lvl="0" marL="457200" indent="-228600">
+              <a:buFont typeface="Calibri"/>
+              <a:spcAft>
+                <a:spcPts val="1000"/>
+              </a:spcAft>
+              <a:buSzPct val="100000"/>
               <a:buChar char="•"/>
               <a:lnSpc>
                 <a:spcPts val="2200"/>
@@ -13070,10 +13174,12 @@
             </a:r>
           </a:p>
           <a:p>
-            <a:pPr>
-              <a:spcAft>
-                <a:spcPts val="1000"/>
-              </a:spcAft>
+            <a:pPr lvl="0" marL="457200" indent="-228600">
+              <a:buFont typeface="Calibri"/>
+              <a:spcAft>
+                <a:spcPts val="1000"/>
+              </a:spcAft>
+              <a:buSzPct val="100000"/>
               <a:buChar char="•"/>
               <a:lnSpc>
                 <a:spcPts val="2200"/>
@@ -13090,10 +13196,12 @@
             </a:r>
           </a:p>
           <a:p>
-            <a:pPr>
-              <a:spcAft>
-                <a:spcPts val="1000"/>
-              </a:spcAft>
+            <a:pPr lvl="0" marL="457200" indent="-228600">
+              <a:buFont typeface="Calibri"/>
+              <a:spcAft>
+                <a:spcPts val="1000"/>
+              </a:spcAft>
+              <a:buSzPct val="100000"/>
               <a:buChar char="•"/>
               <a:lnSpc>
                 <a:spcPts val="2200"/>
@@ -13110,10 +13218,12 @@
             </a:r>
           </a:p>
           <a:p>
-            <a:pPr>
-              <a:spcAft>
-                <a:spcPts val="1000"/>
-              </a:spcAft>
+            <a:pPr lvl="0" marL="457200" indent="-228600">
+              <a:buFont typeface="Calibri"/>
+              <a:spcAft>
+                <a:spcPts val="1000"/>
+              </a:spcAft>
+              <a:buSzPct val="100000"/>
               <a:buChar char="•"/>
               <a:lnSpc>
                 <a:spcPts val="2200"/>
@@ -13130,10 +13240,12 @@
             </a:r>
           </a:p>
           <a:p>
-            <a:pPr>
-              <a:spcAft>
-                <a:spcPts val="1000"/>
-              </a:spcAft>
+            <a:pPr lvl="0" marL="457200" indent="-228600">
+              <a:buFont typeface="Calibri"/>
+              <a:spcAft>
+                <a:spcPts val="1000"/>
+              </a:spcAft>
+              <a:buSzPct val="100000"/>
               <a:buChar char="•"/>
               <a:lnSpc>
                 <a:spcPts val="2200"/>
@@ -13150,10 +13262,12 @@
             </a:r>
           </a:p>
           <a:p>
-            <a:pPr>
-              <a:spcAft>
-                <a:spcPts val="1000"/>
-              </a:spcAft>
+            <a:pPr lvl="0" marL="457200" indent="-228600">
+              <a:buFont typeface="Calibri"/>
+              <a:spcAft>
+                <a:spcPts val="1000"/>
+              </a:spcAft>
+              <a:buSzPct val="100000"/>
               <a:buChar char="•"/>
               <a:lnSpc>
                 <a:spcPts val="2200"/>
@@ -13289,10 +13403,12 @@
           </a:bodyPr>
           <a:lstStyle/>
           <a:p>
-            <a:pPr>
-              <a:spcAft>
-                <a:spcPts val="1000"/>
-              </a:spcAft>
+            <a:pPr lvl="0" marL="457200" indent="-228600">
+              <a:buFont typeface="Calibri"/>
+              <a:spcAft>
+                <a:spcPts val="1000"/>
+              </a:spcAft>
+              <a:buSzPct val="100000"/>
               <a:buChar char="•"/>
               <a:lnSpc>
                 <a:spcPts val="2200"/>
@@ -13309,10 +13425,12 @@
             </a:r>
           </a:p>
           <a:p>
-            <a:pPr>
-              <a:spcAft>
-                <a:spcPts val="1000"/>
-              </a:spcAft>
+            <a:pPr lvl="0" marL="457200" indent="-228600">
+              <a:buFont typeface="Calibri"/>
+              <a:spcAft>
+                <a:spcPts val="1000"/>
+              </a:spcAft>
+              <a:buSzPct val="100000"/>
               <a:buChar char="•"/>
               <a:lnSpc>
                 <a:spcPts val="2200"/>
@@ -13448,10 +13566,12 @@
           </a:bodyPr>
           <a:lstStyle/>
           <a:p>
-            <a:pPr>
-              <a:spcAft>
-                <a:spcPts val="1000"/>
-              </a:spcAft>
+            <a:pPr lvl="0" marL="457200" indent="-228600">
+              <a:buFont typeface="Calibri"/>
+              <a:spcAft>
+                <a:spcPts val="1000"/>
+              </a:spcAft>
+              <a:buSzPct val="100000"/>
               <a:buChar char="•"/>
               <a:lnSpc>
                 <a:spcPts val="2200"/>
@@ -13468,10 +13588,12 @@
             </a:r>
           </a:p>
           <a:p>
-            <a:pPr>
-              <a:spcAft>
-                <a:spcPts val="1000"/>
-              </a:spcAft>
+            <a:pPr lvl="0" marL="457200" indent="-228600">
+              <a:buFont typeface="Calibri"/>
+              <a:spcAft>
+                <a:spcPts val="1000"/>
+              </a:spcAft>
+              <a:buSzPct val="100000"/>
               <a:buChar char="•"/>
               <a:lnSpc>
                 <a:spcPts val="2200"/>
@@ -13488,10 +13610,12 @@
             </a:r>
           </a:p>
           <a:p>
-            <a:pPr>
-              <a:spcAft>
-                <a:spcPts val="1000"/>
-              </a:spcAft>
+            <a:pPr lvl="0" marL="457200" indent="-228600">
+              <a:buFont typeface="Calibri"/>
+              <a:spcAft>
+                <a:spcPts val="1000"/>
+              </a:spcAft>
+              <a:buSzPct val="100000"/>
               <a:buChar char="•"/>
               <a:lnSpc>
                 <a:spcPts val="2200"/>
@@ -13508,10 +13632,12 @@
             </a:r>
           </a:p>
           <a:p>
-            <a:pPr>
-              <a:spcAft>
-                <a:spcPts val="1000"/>
-              </a:spcAft>
+            <a:pPr lvl="0" marL="457200" indent="-228600">
+              <a:buFont typeface="Calibri"/>
+              <a:spcAft>
+                <a:spcPts val="1000"/>
+              </a:spcAft>
+              <a:buSzPct val="100000"/>
               <a:buChar char="•"/>
               <a:lnSpc>
                 <a:spcPts val="2200"/>
@@ -13647,10 +13773,12 @@
           </a:bodyPr>
           <a:lstStyle/>
           <a:p>
-            <a:pPr>
-              <a:spcAft>
-                <a:spcPts val="1000"/>
-              </a:spcAft>
+            <a:pPr lvl="0" marL="457200" indent="-228600">
+              <a:buFont typeface="Calibri"/>
+              <a:spcAft>
+                <a:spcPts val="1000"/>
+              </a:spcAft>
+              <a:buSzPct val="100000"/>
               <a:buChar char="•"/>
               <a:lnSpc>
                 <a:spcPts val="2200"/>
@@ -13667,10 +13795,12 @@
             </a:r>
           </a:p>
           <a:p>
-            <a:pPr>
-              <a:spcAft>
-                <a:spcPts val="1000"/>
-              </a:spcAft>
+            <a:pPr lvl="0" marL="457200" indent="-228600">
+              <a:buFont typeface="Calibri"/>
+              <a:spcAft>
+                <a:spcPts val="1000"/>
+              </a:spcAft>
+              <a:buSzPct val="100000"/>
               <a:buChar char="•"/>
               <a:lnSpc>
                 <a:spcPts val="2200"/>
@@ -13806,10 +13936,12 @@
           </a:bodyPr>
           <a:lstStyle/>
           <a:p>
-            <a:pPr>
-              <a:spcAft>
-                <a:spcPts val="1000"/>
-              </a:spcAft>
+            <a:pPr lvl="0" marL="457200" indent="-228600">
+              <a:buFont typeface="Calibri"/>
+              <a:spcAft>
+                <a:spcPts val="1000"/>
+              </a:spcAft>
+              <a:buSzPct val="100000"/>
               <a:buChar char="•"/>
               <a:lnSpc>
                 <a:spcPts val="2200"/>
@@ -13826,10 +13958,12 @@
             </a:r>
           </a:p>
           <a:p>
-            <a:pPr>
-              <a:spcAft>
-                <a:spcPts val="1000"/>
-              </a:spcAft>
+            <a:pPr lvl="0" marL="457200" indent="-228600">
+              <a:buFont typeface="Calibri"/>
+              <a:spcAft>
+                <a:spcPts val="1000"/>
+              </a:spcAft>
+              <a:buSzPct val="100000"/>
               <a:buChar char="•"/>
               <a:lnSpc>
                 <a:spcPts val="2200"/>
@@ -13846,10 +13980,12 @@
             </a:r>
           </a:p>
           <a:p>
-            <a:pPr>
-              <a:spcAft>
-                <a:spcPts val="1000"/>
-              </a:spcAft>
+            <a:pPr lvl="0" marL="457200" indent="-228600">
+              <a:buFont typeface="Calibri"/>
+              <a:spcAft>
+                <a:spcPts val="1000"/>
+              </a:spcAft>
+              <a:buSzPct val="100000"/>
               <a:buChar char="•"/>
               <a:lnSpc>
                 <a:spcPts val="2200"/>
@@ -13985,10 +14121,12 @@
           </a:bodyPr>
           <a:lstStyle/>
           <a:p>
-            <a:pPr>
-              <a:spcAft>
-                <a:spcPts val="1000"/>
-              </a:spcAft>
+            <a:pPr lvl="0" marL="457200" indent="-228600">
+              <a:buFont typeface="Calibri"/>
+              <a:spcAft>
+                <a:spcPts val="1000"/>
+              </a:spcAft>
+              <a:buSzPct val="100000"/>
               <a:buChar char="•"/>
               <a:lnSpc>
                 <a:spcPts val="2200"/>
@@ -14124,10 +14262,12 @@
           </a:bodyPr>
           <a:lstStyle/>
           <a:p>
-            <a:pPr>
-              <a:spcAft>
-                <a:spcPts val="1000"/>
-              </a:spcAft>
+            <a:pPr lvl="0" marL="457200" indent="-228600">
+              <a:buFont typeface="Calibri"/>
+              <a:spcAft>
+                <a:spcPts val="1000"/>
+              </a:spcAft>
+              <a:buSzPct val="100000"/>
               <a:buChar char="•"/>
               <a:lnSpc>
                 <a:spcPts val="2200"/>
@@ -14144,10 +14284,12 @@
             </a:r>
           </a:p>
           <a:p>
-            <a:pPr>
-              <a:spcAft>
-                <a:spcPts val="1000"/>
-              </a:spcAft>
+            <a:pPr lvl="0" marL="457200" indent="-228600">
+              <a:buFont typeface="Calibri"/>
+              <a:spcAft>
+                <a:spcPts val="1000"/>
+              </a:spcAft>
+              <a:buSzPct val="100000"/>
               <a:buChar char="•"/>
               <a:lnSpc>
                 <a:spcPts val="2200"/>
@@ -14164,10 +14306,12 @@
             </a:r>
           </a:p>
           <a:p>
-            <a:pPr>
-              <a:spcAft>
-                <a:spcPts val="1000"/>
-              </a:spcAft>
+            <a:pPr lvl="0" marL="457200" indent="-228600">
+              <a:buFont typeface="Calibri"/>
+              <a:spcAft>
+                <a:spcPts val="1000"/>
+              </a:spcAft>
+              <a:buSzPct val="100000"/>
               <a:buChar char="•"/>
               <a:lnSpc>
                 <a:spcPts val="2200"/>
@@ -14303,10 +14447,12 @@
           </a:bodyPr>
           <a:lstStyle/>
           <a:p>
-            <a:pPr>
-              <a:spcAft>
-                <a:spcPts val="1000"/>
-              </a:spcAft>
+            <a:pPr lvl="0" marL="457200" indent="-228600">
+              <a:buFont typeface="Calibri"/>
+              <a:spcAft>
+                <a:spcPts val="1000"/>
+              </a:spcAft>
+              <a:buSzPct val="100000"/>
               <a:buChar char="•"/>
               <a:lnSpc>
                 <a:spcPts val="2200"/>
@@ -14323,10 +14469,12 @@
             </a:r>
           </a:p>
           <a:p>
-            <a:pPr>
-              <a:spcAft>
-                <a:spcPts val="1000"/>
-              </a:spcAft>
+            <a:pPr lvl="0" marL="457200" indent="-228600">
+              <a:buFont typeface="Calibri"/>
+              <a:spcAft>
+                <a:spcPts val="1000"/>
+              </a:spcAft>
+              <a:buSzPct val="100000"/>
               <a:buChar char="•"/>
               <a:lnSpc>
                 <a:spcPts val="2200"/>
@@ -14462,10 +14610,12 @@
           </a:bodyPr>
           <a:lstStyle/>
           <a:p>
-            <a:pPr>
-              <a:spcAft>
-                <a:spcPts val="1000"/>
-              </a:spcAft>
+            <a:pPr lvl="0" marL="457200" indent="-228600">
+              <a:buFont typeface="Calibri"/>
+              <a:spcAft>
+                <a:spcPts val="1000"/>
+              </a:spcAft>
+              <a:buSzPct val="100000"/>
               <a:buChar char="•"/>
               <a:lnSpc>
                 <a:spcPts val="2200"/>
@@ -14482,10 +14632,12 @@
             </a:r>
           </a:p>
           <a:p>
-            <a:pPr>
-              <a:spcAft>
-                <a:spcPts val="1000"/>
-              </a:spcAft>
+            <a:pPr lvl="0" marL="457200" indent="-228600">
+              <a:buFont typeface="Calibri"/>
+              <a:spcAft>
+                <a:spcPts val="1000"/>
+              </a:spcAft>
+              <a:buSzPct val="100000"/>
               <a:buChar char="•"/>
               <a:lnSpc>
                 <a:spcPts val="2200"/>
@@ -14502,10 +14654,12 @@
             </a:r>
           </a:p>
           <a:p>
-            <a:pPr>
-              <a:spcAft>
-                <a:spcPts val="1000"/>
-              </a:spcAft>
+            <a:pPr lvl="0" marL="457200" indent="-228600">
+              <a:buFont typeface="Calibri"/>
+              <a:spcAft>
+                <a:spcPts val="1000"/>
+              </a:spcAft>
+              <a:buSzPct val="100000"/>
               <a:buChar char="•"/>
               <a:lnSpc>
                 <a:spcPts val="2200"/>
@@ -14522,10 +14676,12 @@
             </a:r>
           </a:p>
           <a:p>
-            <a:pPr>
-              <a:spcAft>
-                <a:spcPts val="1000"/>
-              </a:spcAft>
+            <a:pPr lvl="0" marL="457200" indent="-228600">
+              <a:buFont typeface="Calibri"/>
+              <a:spcAft>
+                <a:spcPts val="1000"/>
+              </a:spcAft>
+              <a:buSzPct val="100000"/>
               <a:buChar char="•"/>
               <a:lnSpc>
                 <a:spcPts val="2200"/>
@@ -14542,10 +14698,12 @@
             </a:r>
           </a:p>
           <a:p>
-            <a:pPr>
-              <a:spcAft>
-                <a:spcPts val="1000"/>
-              </a:spcAft>
+            <a:pPr lvl="0" marL="457200" indent="-228600">
+              <a:buFont typeface="Calibri"/>
+              <a:spcAft>
+                <a:spcPts val="1000"/>
+              </a:spcAft>
+              <a:buSzPct val="100000"/>
               <a:buChar char="•"/>
               <a:lnSpc>
                 <a:spcPts val="2200"/>
@@ -14681,10 +14839,12 @@
           </a:bodyPr>
           <a:lstStyle/>
           <a:p>
-            <a:pPr>
-              <a:spcAft>
-                <a:spcPts val="1000"/>
-              </a:spcAft>
+            <a:pPr lvl="0" marL="457200" indent="-228600">
+              <a:buFont typeface="Calibri"/>
+              <a:spcAft>
+                <a:spcPts val="1000"/>
+              </a:spcAft>
+              <a:buSzPct val="100000"/>
               <a:buChar char="•"/>
               <a:lnSpc>
                 <a:spcPts val="2200"/>
@@ -14701,10 +14861,12 @@
             </a:r>
           </a:p>
           <a:p>
-            <a:pPr>
-              <a:spcAft>
-                <a:spcPts val="1000"/>
-              </a:spcAft>
+            <a:pPr lvl="0" marL="457200" indent="-228600">
+              <a:buFont typeface="Calibri"/>
+              <a:spcAft>
+                <a:spcPts val="1000"/>
+              </a:spcAft>
+              <a:buSzPct val="100000"/>
               <a:buChar char="•"/>
               <a:lnSpc>
                 <a:spcPts val="2200"/>
@@ -14721,10 +14883,12 @@
             </a:r>
           </a:p>
           <a:p>
-            <a:pPr>
-              <a:spcAft>
-                <a:spcPts val="1000"/>
-              </a:spcAft>
+            <a:pPr lvl="0" marL="457200" indent="-228600">
+              <a:buFont typeface="Calibri"/>
+              <a:spcAft>
+                <a:spcPts val="1000"/>
+              </a:spcAft>
+              <a:buSzPct val="100000"/>
               <a:buChar char="•"/>
               <a:lnSpc>
                 <a:spcPts val="2200"/>
@@ -14741,10 +14905,12 @@
             </a:r>
           </a:p>
           <a:p>
-            <a:pPr>
-              <a:spcAft>
-                <a:spcPts val="1000"/>
-              </a:spcAft>
+            <a:pPr lvl="0" marL="457200" indent="-228600">
+              <a:buFont typeface="Calibri"/>
+              <a:spcAft>
+                <a:spcPts val="1000"/>
+              </a:spcAft>
+              <a:buSzPct val="100000"/>
               <a:buChar char="•"/>
               <a:lnSpc>
                 <a:spcPts val="2200"/>
@@ -14761,10 +14927,12 @@
             </a:r>
           </a:p>
           <a:p>
-            <a:pPr>
-              <a:spcAft>
-                <a:spcPts val="1000"/>
-              </a:spcAft>
+            <a:pPr lvl="0" marL="457200" indent="-228600">
+              <a:buFont typeface="Calibri"/>
+              <a:spcAft>
+                <a:spcPts val="1000"/>
+              </a:spcAft>
+              <a:buSzPct val="100000"/>
               <a:buChar char="•"/>
               <a:lnSpc>
                 <a:spcPts val="2200"/>
@@ -14900,10 +15068,12 @@
           </a:bodyPr>
           <a:lstStyle/>
           <a:p>
-            <a:pPr>
-              <a:spcAft>
-                <a:spcPts val="1000"/>
-              </a:spcAft>
+            <a:pPr lvl="0" marL="457200" indent="-228600">
+              <a:buFont typeface="Calibri"/>
+              <a:spcAft>
+                <a:spcPts val="1000"/>
+              </a:spcAft>
+              <a:buSzPct val="100000"/>
               <a:buChar char="•"/>
               <a:lnSpc>
                 <a:spcPts val="2200"/>
@@ -14920,10 +15090,12 @@
             </a:r>
           </a:p>
           <a:p>
-            <a:pPr>
-              <a:spcAft>
-                <a:spcPts val="1000"/>
-              </a:spcAft>
+            <a:pPr lvl="0" marL="457200" indent="-228600">
+              <a:buFont typeface="Calibri"/>
+              <a:spcAft>
+                <a:spcPts val="1000"/>
+              </a:spcAft>
+              <a:buSzPct val="100000"/>
               <a:buChar char="•"/>
               <a:lnSpc>
                 <a:spcPts val="2200"/>
@@ -14940,10 +15112,12 @@
             </a:r>
           </a:p>
           <a:p>
-            <a:pPr>
-              <a:spcAft>
-                <a:spcPts val="1000"/>
-              </a:spcAft>
+            <a:pPr lvl="0" marL="457200" indent="-228600">
+              <a:buFont typeface="Calibri"/>
+              <a:spcAft>
+                <a:spcPts val="1000"/>
+              </a:spcAft>
+              <a:buSzPct val="100000"/>
               <a:buChar char="•"/>
               <a:lnSpc>
                 <a:spcPts val="2200"/>
@@ -14960,10 +15134,12 @@
             </a:r>
           </a:p>
           <a:p>
-            <a:pPr>
-              <a:spcAft>
-                <a:spcPts val="1000"/>
-              </a:spcAft>
+            <a:pPr lvl="0" marL="457200" indent="-228600">
+              <a:buFont typeface="Calibri"/>
+              <a:spcAft>
+                <a:spcPts val="1000"/>
+              </a:spcAft>
+              <a:buSzPct val="100000"/>
               <a:buChar char="•"/>
               <a:lnSpc>
                 <a:spcPts val="2200"/>
@@ -14980,10 +15156,12 @@
             </a:r>
           </a:p>
           <a:p>
-            <a:pPr>
-              <a:spcAft>
-                <a:spcPts val="1000"/>
-              </a:spcAft>
+            <a:pPr lvl="0" marL="457200" indent="-228600">
+              <a:buFont typeface="Calibri"/>
+              <a:spcAft>
+                <a:spcPts val="1000"/>
+              </a:spcAft>
+              <a:buSzPct val="100000"/>
               <a:buChar char="•"/>
               <a:lnSpc>
                 <a:spcPts val="2200"/>
@@ -15119,10 +15297,12 @@
           </a:bodyPr>
           <a:lstStyle/>
           <a:p>
-            <a:pPr>
-              <a:spcAft>
-                <a:spcPts val="1000"/>
-              </a:spcAft>
+            <a:pPr lvl="0" marL="457200" indent="-228600">
+              <a:buFont typeface="Calibri"/>
+              <a:spcAft>
+                <a:spcPts val="1000"/>
+              </a:spcAft>
+              <a:buSzPct val="100000"/>
               <a:buChar char="•"/>
               <a:lnSpc>
                 <a:spcPts val="2200"/>
@@ -15139,10 +15319,12 @@
             </a:r>
           </a:p>
           <a:p>
-            <a:pPr>
-              <a:spcAft>
-                <a:spcPts val="1000"/>
-              </a:spcAft>
+            <a:pPr lvl="0" marL="457200" indent="-228600">
+              <a:buFont typeface="Calibri"/>
+              <a:spcAft>
+                <a:spcPts val="1000"/>
+              </a:spcAft>
+              <a:buSzPct val="100000"/>
               <a:buChar char="•"/>
               <a:lnSpc>
                 <a:spcPts val="2200"/>
@@ -15278,10 +15460,12 @@
           </a:bodyPr>
           <a:lstStyle/>
           <a:p>
-            <a:pPr>
-              <a:spcAft>
-                <a:spcPts val="1000"/>
-              </a:spcAft>
+            <a:pPr lvl="0" marL="457200" indent="-228600">
+              <a:buFont typeface="Calibri"/>
+              <a:spcAft>
+                <a:spcPts val="1000"/>
+              </a:spcAft>
+              <a:buSzPct val="100000"/>
               <a:buChar char="•"/>
               <a:lnSpc>
                 <a:spcPts val="2200"/>
@@ -15298,10 +15482,12 @@
             </a:r>
           </a:p>
           <a:p>
-            <a:pPr>
-              <a:spcAft>
-                <a:spcPts val="1000"/>
-              </a:spcAft>
+            <a:pPr lvl="0" marL="457200" indent="-228600">
+              <a:buFont typeface="Calibri"/>
+              <a:spcAft>
+                <a:spcPts val="1000"/>
+              </a:spcAft>
+              <a:buSzPct val="100000"/>
               <a:buChar char="•"/>
               <a:lnSpc>
                 <a:spcPts val="2200"/>
@@ -15318,10 +15504,12 @@
             </a:r>
           </a:p>
           <a:p>
-            <a:pPr>
-              <a:spcAft>
-                <a:spcPts val="1000"/>
-              </a:spcAft>
+            <a:pPr lvl="0" marL="457200" indent="-228600">
+              <a:buFont typeface="Calibri"/>
+              <a:spcAft>
+                <a:spcPts val="1000"/>
+              </a:spcAft>
+              <a:buSzPct val="100000"/>
               <a:buChar char="•"/>
               <a:lnSpc>
                 <a:spcPts val="2200"/>
@@ -15338,10 +15526,12 @@
             </a:r>
           </a:p>
           <a:p>
-            <a:pPr>
-              <a:spcAft>
-                <a:spcPts val="1000"/>
-              </a:spcAft>
+            <a:pPr lvl="0" marL="457200" indent="-228600">
+              <a:buFont typeface="Calibri"/>
+              <a:spcAft>
+                <a:spcPts val="1000"/>
+              </a:spcAft>
+              <a:buSzPct val="100000"/>
               <a:buChar char="•"/>
               <a:lnSpc>
                 <a:spcPts val="2200"/>
@@ -15358,10 +15548,12 @@
             </a:r>
           </a:p>
           <a:p>
-            <a:pPr>
-              <a:spcAft>
-                <a:spcPts val="1000"/>
-              </a:spcAft>
+            <a:pPr lvl="0" marL="457200" indent="-228600">
+              <a:buFont typeface="Calibri"/>
+              <a:spcAft>
+                <a:spcPts val="1000"/>
+              </a:spcAft>
+              <a:buSzPct val="100000"/>
               <a:buChar char="•"/>
               <a:lnSpc>
                 <a:spcPts val="2200"/>
@@ -15497,10 +15689,12 @@
           </a:bodyPr>
           <a:lstStyle/>
           <a:p>
-            <a:pPr>
-              <a:spcAft>
-                <a:spcPts val="1000"/>
-              </a:spcAft>
+            <a:pPr lvl="0" marL="457200" indent="-228600">
+              <a:buFont typeface="Calibri"/>
+              <a:spcAft>
+                <a:spcPts val="1000"/>
+              </a:spcAft>
+              <a:buSzPct val="100000"/>
               <a:buChar char="•"/>
               <a:lnSpc>
                 <a:spcPts val="2200"/>
@@ -15517,10 +15711,12 @@
             </a:r>
           </a:p>
           <a:p>
-            <a:pPr>
-              <a:spcAft>
-                <a:spcPts val="1000"/>
-              </a:spcAft>
+            <a:pPr lvl="0" marL="457200" indent="-228600">
+              <a:buFont typeface="Calibri"/>
+              <a:spcAft>
+                <a:spcPts val="1000"/>
+              </a:spcAft>
+              <a:buSzPct val="100000"/>
               <a:buChar char="•"/>
               <a:lnSpc>
                 <a:spcPts val="2200"/>
@@ -15656,10 +15852,12 @@
           </a:bodyPr>
           <a:lstStyle/>
           <a:p>
-            <a:pPr>
-              <a:spcAft>
-                <a:spcPts val="1000"/>
-              </a:spcAft>
+            <a:pPr lvl="0" marL="457200" indent="-228600">
+              <a:buFont typeface="Calibri"/>
+              <a:spcAft>
+                <a:spcPts val="1000"/>
+              </a:spcAft>
+              <a:buSzPct val="100000"/>
               <a:buChar char="•"/>
               <a:lnSpc>
                 <a:spcPts val="2200"/>
@@ -15795,10 +15993,12 @@
           </a:bodyPr>
           <a:lstStyle/>
           <a:p>
-            <a:pPr>
-              <a:spcAft>
-                <a:spcPts val="1000"/>
-              </a:spcAft>
+            <a:pPr lvl="0" marL="457200" indent="-228600">
+              <a:buFont typeface="Calibri"/>
+              <a:spcAft>
+                <a:spcPts val="1000"/>
+              </a:spcAft>
+              <a:buSzPct val="100000"/>
               <a:buChar char="•"/>
               <a:lnSpc>
                 <a:spcPts val="2200"/>
@@ -15815,10 +16015,12 @@
             </a:r>
           </a:p>
           <a:p>
-            <a:pPr>
-              <a:spcAft>
-                <a:spcPts val="1000"/>
-              </a:spcAft>
+            <a:pPr lvl="0" marL="457200" indent="-228600">
+              <a:buFont typeface="Calibri"/>
+              <a:spcAft>
+                <a:spcPts val="1000"/>
+              </a:spcAft>
+              <a:buSzPct val="100000"/>
               <a:buChar char="•"/>
               <a:lnSpc>
                 <a:spcPts val="2200"/>
@@ -15835,10 +16037,12 @@
             </a:r>
           </a:p>
           <a:p>
-            <a:pPr>
-              <a:spcAft>
-                <a:spcPts val="1000"/>
-              </a:spcAft>
+            <a:pPr lvl="0" marL="457200" indent="-228600">
+              <a:buFont typeface="Calibri"/>
+              <a:spcAft>
+                <a:spcPts val="1000"/>
+              </a:spcAft>
+              <a:buSzPct val="100000"/>
               <a:buChar char="•"/>
               <a:lnSpc>
                 <a:spcPts val="2200"/>
@@ -15974,10 +16178,12 @@
           </a:bodyPr>
           <a:lstStyle/>
           <a:p>
-            <a:pPr>
-              <a:spcAft>
-                <a:spcPts val="1000"/>
-              </a:spcAft>
+            <a:pPr lvl="0" marL="457200" indent="-228600">
+              <a:buFont typeface="Calibri"/>
+              <a:spcAft>
+                <a:spcPts val="1000"/>
+              </a:spcAft>
+              <a:buSzPct val="100000"/>
               <a:buChar char="•"/>
               <a:lnSpc>
                 <a:spcPts val="2200"/>
@@ -15994,10 +16200,12 @@
             </a:r>
           </a:p>
           <a:p>
-            <a:pPr>
-              <a:spcAft>
-                <a:spcPts val="1000"/>
-              </a:spcAft>
+            <a:pPr lvl="0" marL="457200" indent="-228600">
+              <a:buFont typeface="Calibri"/>
+              <a:spcAft>
+                <a:spcPts val="1000"/>
+              </a:spcAft>
+              <a:buSzPct val="100000"/>
               <a:buChar char="•"/>
               <a:lnSpc>
                 <a:spcPts val="2200"/>
@@ -16014,10 +16222,12 @@
             </a:r>
           </a:p>
           <a:p>
-            <a:pPr>
-              <a:spcAft>
-                <a:spcPts val="1000"/>
-              </a:spcAft>
+            <a:pPr lvl="0" marL="457200" indent="-228600">
+              <a:buFont typeface="Calibri"/>
+              <a:spcAft>
+                <a:spcPts val="1000"/>
+              </a:spcAft>
+              <a:buSzPct val="100000"/>
               <a:buChar char="•"/>
               <a:lnSpc>
                 <a:spcPts val="2200"/>
@@ -16034,10 +16244,12 @@
             </a:r>
           </a:p>
           <a:p>
-            <a:pPr>
-              <a:spcAft>
-                <a:spcPts val="1000"/>
-              </a:spcAft>
+            <a:pPr lvl="0" marL="457200" indent="-228600">
+              <a:buFont typeface="Calibri"/>
+              <a:spcAft>
+                <a:spcPts val="1000"/>
+              </a:spcAft>
+              <a:buSzPct val="100000"/>
               <a:buChar char="•"/>
               <a:lnSpc>
                 <a:spcPts val="2200"/>
@@ -16173,10 +16385,12 @@
           </a:bodyPr>
           <a:lstStyle/>
           <a:p>
-            <a:pPr>
-              <a:spcAft>
-                <a:spcPts val="1000"/>
-              </a:spcAft>
+            <a:pPr lvl="0" marL="457200" indent="-228600">
+              <a:buFont typeface="Calibri"/>
+              <a:spcAft>
+                <a:spcPts val="1000"/>
+              </a:spcAft>
+              <a:buSzPct val="100000"/>
               <a:buChar char="•"/>
               <a:lnSpc>
                 <a:spcPts val="2200"/>
@@ -16193,10 +16407,12 @@
             </a:r>
           </a:p>
           <a:p>
-            <a:pPr>
-              <a:spcAft>
-                <a:spcPts val="1000"/>
-              </a:spcAft>
+            <a:pPr lvl="0" marL="457200" indent="-228600">
+              <a:buFont typeface="Calibri"/>
+              <a:spcAft>
+                <a:spcPts val="1000"/>
+              </a:spcAft>
+              <a:buSzPct val="100000"/>
               <a:buChar char="•"/>
               <a:lnSpc>
                 <a:spcPts val="2200"/>
@@ -16213,10 +16429,12 @@
             </a:r>
           </a:p>
           <a:p>
-            <a:pPr>
-              <a:spcAft>
-                <a:spcPts val="1000"/>
-              </a:spcAft>
+            <a:pPr lvl="0" marL="457200" indent="-228600">
+              <a:buFont typeface="Calibri"/>
+              <a:spcAft>
+                <a:spcPts val="1000"/>
+              </a:spcAft>
+              <a:buSzPct val="100000"/>
               <a:buChar char="•"/>
               <a:lnSpc>
                 <a:spcPts val="2200"/>
@@ -16352,10 +16570,12 @@
           </a:bodyPr>
           <a:lstStyle/>
           <a:p>
-            <a:pPr>
-              <a:spcAft>
-                <a:spcPts val="1000"/>
-              </a:spcAft>
+            <a:pPr lvl="0" marL="457200" indent="-228600">
+              <a:buFont typeface="Calibri"/>
+              <a:spcAft>
+                <a:spcPts val="1000"/>
+              </a:spcAft>
+              <a:buSzPct val="100000"/>
               <a:buChar char="•"/>
               <a:lnSpc>
                 <a:spcPts val="2200"/>
@@ -16372,10 +16592,12 @@
             </a:r>
           </a:p>
           <a:p>
-            <a:pPr>
-              <a:spcAft>
-                <a:spcPts val="1000"/>
-              </a:spcAft>
+            <a:pPr lvl="0" marL="457200" indent="-228600">
+              <a:buFont typeface="Calibri"/>
+              <a:spcAft>
+                <a:spcPts val="1000"/>
+              </a:spcAft>
+              <a:buSzPct val="100000"/>
               <a:buChar char="•"/>
               <a:lnSpc>
                 <a:spcPts val="2200"/>
@@ -16392,10 +16614,12 @@
             </a:r>
           </a:p>
           <a:p>
-            <a:pPr>
-              <a:spcAft>
-                <a:spcPts val="1000"/>
-              </a:spcAft>
+            <a:pPr lvl="0" marL="457200" indent="-228600">
+              <a:buFont typeface="Calibri"/>
+              <a:spcAft>
+                <a:spcPts val="1000"/>
+              </a:spcAft>
+              <a:buSzPct val="100000"/>
               <a:buChar char="•"/>
               <a:lnSpc>
                 <a:spcPts val="2200"/>
@@ -16412,10 +16636,12 @@
             </a:r>
           </a:p>
           <a:p>
-            <a:pPr>
-              <a:spcAft>
-                <a:spcPts val="1000"/>
-              </a:spcAft>
+            <a:pPr lvl="0" marL="457200" indent="-228600">
+              <a:buFont typeface="Calibri"/>
+              <a:spcAft>
+                <a:spcPts val="1000"/>
+              </a:spcAft>
+              <a:buSzPct val="100000"/>
               <a:buChar char="•"/>
               <a:lnSpc>
                 <a:spcPts val="2200"/>
@@ -16432,10 +16658,12 @@
             </a:r>
           </a:p>
           <a:p>
-            <a:pPr>
-              <a:spcAft>
-                <a:spcPts val="1000"/>
-              </a:spcAft>
+            <a:pPr lvl="0" marL="457200" indent="-228600">
+              <a:buFont typeface="Calibri"/>
+              <a:spcAft>
+                <a:spcPts val="1000"/>
+              </a:spcAft>
+              <a:buSzPct val="100000"/>
               <a:buChar char="•"/>
               <a:lnSpc>
                 <a:spcPts val="2200"/>
@@ -17034,10 +17262,12 @@
           </a:bodyPr>
           <a:lstStyle/>
           <a:p>
-            <a:pPr>
-              <a:spcAft>
-                <a:spcPts val="1000"/>
-              </a:spcAft>
+            <a:pPr lvl="0" marL="457200" indent="-228600">
+              <a:buFont typeface="Calibri"/>
+              <a:spcAft>
+                <a:spcPts val="1000"/>
+              </a:spcAft>
+              <a:buSzPct val="100000"/>
               <a:buChar char="•"/>
               <a:lnSpc>
                 <a:spcPts val="2200"/>
@@ -17054,10 +17284,12 @@
             </a:r>
           </a:p>
           <a:p>
-            <a:pPr>
-              <a:spcAft>
-                <a:spcPts val="1000"/>
-              </a:spcAft>
+            <a:pPr lvl="0" marL="457200" indent="-228600">
+              <a:buFont typeface="Calibri"/>
+              <a:spcAft>
+                <a:spcPts val="1000"/>
+              </a:spcAft>
+              <a:buSzPct val="100000"/>
               <a:buChar char="•"/>
               <a:lnSpc>
                 <a:spcPts val="2200"/>
@@ -17074,10 +17306,12 @@
             </a:r>
           </a:p>
           <a:p>
-            <a:pPr>
-              <a:spcAft>
-                <a:spcPts val="1000"/>
-              </a:spcAft>
+            <a:pPr lvl="0" marL="457200" indent="-228600">
+              <a:buFont typeface="Calibri"/>
+              <a:spcAft>
+                <a:spcPts val="1000"/>
+              </a:spcAft>
+              <a:buSzPct val="100000"/>
               <a:buChar char="•"/>
               <a:lnSpc>
                 <a:spcPts val="2200"/>
@@ -17094,10 +17328,12 @@
             </a:r>
           </a:p>
           <a:p>
-            <a:pPr>
-              <a:spcAft>
-                <a:spcPts val="1000"/>
-              </a:spcAft>
+            <a:pPr lvl="0" marL="457200" indent="-228600">
+              <a:buFont typeface="Calibri"/>
+              <a:spcAft>
+                <a:spcPts val="1000"/>
+              </a:spcAft>
+              <a:buSzPct val="100000"/>
               <a:buChar char="•"/>
               <a:lnSpc>
                 <a:spcPts val="2200"/>
@@ -17114,10 +17350,12 @@
             </a:r>
           </a:p>
           <a:p>
-            <a:pPr>
-              <a:spcAft>
-                <a:spcPts val="1000"/>
-              </a:spcAft>
+            <a:pPr lvl="0" marL="457200" indent="-228600">
+              <a:buFont typeface="Calibri"/>
+              <a:spcAft>
+                <a:spcPts val="1000"/>
+              </a:spcAft>
+              <a:buSzPct val="100000"/>
               <a:buChar char="•"/>
               <a:lnSpc>
                 <a:spcPts val="2200"/>
@@ -17253,10 +17491,12 @@
           </a:bodyPr>
           <a:lstStyle/>
           <a:p>
-            <a:pPr>
-              <a:spcAft>
-                <a:spcPts val="1000"/>
-              </a:spcAft>
+            <a:pPr lvl="0" marL="457200" indent="-228600">
+              <a:buFont typeface="Calibri"/>
+              <a:spcAft>
+                <a:spcPts val="1000"/>
+              </a:spcAft>
+              <a:buSzPct val="100000"/>
               <a:buChar char="•"/>
               <a:lnSpc>
                 <a:spcPts val="2200"/>
@@ -17273,10 +17513,12 @@
             </a:r>
           </a:p>
           <a:p>
-            <a:pPr>
-              <a:spcAft>
-                <a:spcPts val="1000"/>
-              </a:spcAft>
+            <a:pPr lvl="0" marL="457200" indent="-228600">
+              <a:buFont typeface="Calibri"/>
+              <a:spcAft>
+                <a:spcPts val="1000"/>
+              </a:spcAft>
+              <a:buSzPct val="100000"/>
               <a:buChar char="•"/>
               <a:lnSpc>
                 <a:spcPts val="2200"/>
@@ -17293,10 +17535,12 @@
             </a:r>
           </a:p>
           <a:p>
-            <a:pPr>
-              <a:spcAft>
-                <a:spcPts val="1000"/>
-              </a:spcAft>
+            <a:pPr lvl="0" marL="457200" indent="-228600">
+              <a:buFont typeface="Calibri"/>
+              <a:spcAft>
+                <a:spcPts val="1000"/>
+              </a:spcAft>
+              <a:buSzPct val="100000"/>
               <a:buChar char="•"/>
               <a:lnSpc>
                 <a:spcPts val="2200"/>
@@ -17313,10 +17557,12 @@
             </a:r>
           </a:p>
           <a:p>
-            <a:pPr>
-              <a:spcAft>
-                <a:spcPts val="1000"/>
-              </a:spcAft>
+            <a:pPr lvl="0" marL="457200" indent="-228600">
+              <a:buFont typeface="Calibri"/>
+              <a:spcAft>
+                <a:spcPts val="1000"/>
+              </a:spcAft>
+              <a:buSzPct val="100000"/>
               <a:buChar char="•"/>
               <a:lnSpc>
                 <a:spcPts val="2200"/>
@@ -17333,10 +17579,12 @@
             </a:r>
           </a:p>
           <a:p>
-            <a:pPr>
-              <a:spcAft>
-                <a:spcPts val="1000"/>
-              </a:spcAft>
+            <a:pPr lvl="0" marL="457200" indent="-228600">
+              <a:buFont typeface="Calibri"/>
+              <a:spcAft>
+                <a:spcPts val="1000"/>
+              </a:spcAft>
+              <a:buSzPct val="100000"/>
               <a:buChar char="•"/>
               <a:lnSpc>
                 <a:spcPts val="2200"/>
@@ -17353,10 +17601,12 @@
             </a:r>
           </a:p>
           <a:p>
-            <a:pPr>
-              <a:spcAft>
-                <a:spcPts val="1000"/>
-              </a:spcAft>
+            <a:pPr lvl="0" marL="457200" indent="-228600">
+              <a:buFont typeface="Calibri"/>
+              <a:spcAft>
+                <a:spcPts val="1000"/>
+              </a:spcAft>
+              <a:buSzPct val="100000"/>
               <a:buChar char="•"/>
               <a:lnSpc>
                 <a:spcPts val="2200"/>
@@ -17492,10 +17742,12 @@
           </a:bodyPr>
           <a:lstStyle/>
           <a:p>
-            <a:pPr>
-              <a:spcAft>
-                <a:spcPts val="1000"/>
-              </a:spcAft>
+            <a:pPr lvl="0" marL="457200" indent="-228600">
+              <a:buFont typeface="Calibri"/>
+              <a:spcAft>
+                <a:spcPts val="1000"/>
+              </a:spcAft>
+              <a:buSzPct val="100000"/>
               <a:buChar char="•"/>
               <a:lnSpc>
                 <a:spcPts val="2200"/>
@@ -17512,10 +17764,12 @@
             </a:r>
           </a:p>
           <a:p>
-            <a:pPr>
-              <a:spcAft>
-                <a:spcPts val="1000"/>
-              </a:spcAft>
+            <a:pPr lvl="0" marL="457200" indent="-228600">
+              <a:buFont typeface="Calibri"/>
+              <a:spcAft>
+                <a:spcPts val="1000"/>
+              </a:spcAft>
+              <a:buSzPct val="100000"/>
               <a:buChar char="•"/>
               <a:lnSpc>
                 <a:spcPts val="2200"/>
@@ -17532,10 +17786,12 @@
             </a:r>
           </a:p>
           <a:p>
-            <a:pPr>
-              <a:spcAft>
-                <a:spcPts val="1000"/>
-              </a:spcAft>
+            <a:pPr lvl="0" marL="457200" indent="-228600">
+              <a:buFont typeface="Calibri"/>
+              <a:spcAft>
+                <a:spcPts val="1000"/>
+              </a:spcAft>
+              <a:buSzPct val="100000"/>
               <a:buChar char="•"/>
               <a:lnSpc>
                 <a:spcPts val="2200"/>
@@ -17552,10 +17808,12 @@
             </a:r>
           </a:p>
           <a:p>
-            <a:pPr>
-              <a:spcAft>
-                <a:spcPts val="1000"/>
-              </a:spcAft>
+            <a:pPr lvl="0" marL="457200" indent="-228600">
+              <a:buFont typeface="Calibri"/>
+              <a:spcAft>
+                <a:spcPts val="1000"/>
+              </a:spcAft>
+              <a:buSzPct val="100000"/>
               <a:buChar char="•"/>
               <a:lnSpc>
                 <a:spcPts val="2200"/>
@@ -17691,10 +17949,12 @@
           </a:bodyPr>
           <a:lstStyle/>
           <a:p>
-            <a:pPr>
-              <a:spcAft>
-                <a:spcPts val="1000"/>
-              </a:spcAft>
+            <a:pPr lvl="0" marL="457200" indent="-228600">
+              <a:buFont typeface="Calibri"/>
+              <a:spcAft>
+                <a:spcPts val="1000"/>
+              </a:spcAft>
+              <a:buSzPct val="100000"/>
               <a:buChar char="•"/>
               <a:lnSpc>
                 <a:spcPts val="2200"/>
@@ -17711,10 +17971,12 @@
             </a:r>
           </a:p>
           <a:p>
-            <a:pPr>
-              <a:spcAft>
-                <a:spcPts val="1000"/>
-              </a:spcAft>
+            <a:pPr lvl="0" marL="457200" indent="-228600">
+              <a:buFont typeface="Calibri"/>
+              <a:spcAft>
+                <a:spcPts val="1000"/>
+              </a:spcAft>
+              <a:buSzPct val="100000"/>
               <a:buChar char="•"/>
               <a:lnSpc>
                 <a:spcPts val="2200"/>
@@ -17731,10 +17993,12 @@
             </a:r>
           </a:p>
           <a:p>
-            <a:pPr>
-              <a:spcAft>
-                <a:spcPts val="1000"/>
-              </a:spcAft>
+            <a:pPr lvl="0" marL="457200" indent="-228600">
+              <a:buFont typeface="Calibri"/>
+              <a:spcAft>
+                <a:spcPts val="1000"/>
+              </a:spcAft>
+              <a:buSzPct val="100000"/>
               <a:buChar char="•"/>
               <a:lnSpc>
                 <a:spcPts val="2200"/>
@@ -17751,10 +18015,12 @@
             </a:r>
           </a:p>
           <a:p>
-            <a:pPr>
-              <a:spcAft>
-                <a:spcPts val="1000"/>
-              </a:spcAft>
+            <a:pPr lvl="0" marL="457200" indent="-228600">
+              <a:buFont typeface="Calibri"/>
+              <a:spcAft>
+                <a:spcPts val="1000"/>
+              </a:spcAft>
+              <a:buSzPct val="100000"/>
               <a:buChar char="•"/>
               <a:lnSpc>
                 <a:spcPts val="2200"/>
@@ -17890,10 +18156,12 @@
           </a:bodyPr>
           <a:lstStyle/>
           <a:p>
-            <a:pPr>
-              <a:spcAft>
-                <a:spcPts val="1000"/>
-              </a:spcAft>
+            <a:pPr lvl="0" marL="457200" indent="-228600">
+              <a:buFont typeface="Calibri"/>
+              <a:spcAft>
+                <a:spcPts val="1000"/>
+              </a:spcAft>
+              <a:buSzPct val="100000"/>
               <a:buChar char="•"/>
               <a:lnSpc>
                 <a:spcPts val="2200"/>
@@ -17910,10 +18178,12 @@
             </a:r>
           </a:p>
           <a:p>
-            <a:pPr>
-              <a:spcAft>
-                <a:spcPts val="1000"/>
-              </a:spcAft>
+            <a:pPr lvl="0" marL="457200" indent="-228600">
+              <a:buFont typeface="Calibri"/>
+              <a:spcAft>
+                <a:spcPts val="1000"/>
+              </a:spcAft>
+              <a:buSzPct val="100000"/>
               <a:buChar char="•"/>
               <a:lnSpc>
                 <a:spcPts val="2200"/>
@@ -18049,10 +18319,12 @@
           </a:bodyPr>
           <a:lstStyle/>
           <a:p>
-            <a:pPr>
-              <a:spcAft>
-                <a:spcPts val="1000"/>
-              </a:spcAft>
+            <a:pPr lvl="0" marL="457200" indent="-228600">
+              <a:buFont typeface="Calibri"/>
+              <a:spcAft>
+                <a:spcPts val="1000"/>
+              </a:spcAft>
+              <a:buSzPct val="100000"/>
               <a:buChar char="•"/>
               <a:lnSpc>
                 <a:spcPts val="2200"/>
@@ -18188,10 +18460,12 @@
           </a:bodyPr>
           <a:lstStyle/>
           <a:p>
-            <a:pPr>
-              <a:spcAft>
-                <a:spcPts val="1000"/>
-              </a:spcAft>
+            <a:pPr lvl="0" marL="457200" indent="-228600">
+              <a:buFont typeface="Calibri"/>
+              <a:spcAft>
+                <a:spcPts val="1000"/>
+              </a:spcAft>
+              <a:buSzPct val="100000"/>
               <a:buChar char="•"/>
               <a:lnSpc>
                 <a:spcPts val="2200"/>
@@ -18208,10 +18482,12 @@
             </a:r>
           </a:p>
           <a:p>
-            <a:pPr>
-              <a:spcAft>
-                <a:spcPts val="1000"/>
-              </a:spcAft>
+            <a:pPr lvl="0" marL="457200" indent="-228600">
+              <a:buFont typeface="Calibri"/>
+              <a:spcAft>
+                <a:spcPts val="1000"/>
+              </a:spcAft>
+              <a:buSzPct val="100000"/>
               <a:buChar char="•"/>
               <a:lnSpc>
                 <a:spcPts val="2200"/>
@@ -18228,10 +18504,12 @@
             </a:r>
           </a:p>
           <a:p>
-            <a:pPr>
-              <a:spcAft>
-                <a:spcPts val="1000"/>
-              </a:spcAft>
+            <a:pPr lvl="0" marL="457200" indent="-228600">
+              <a:buFont typeface="Calibri"/>
+              <a:spcAft>
+                <a:spcPts val="1000"/>
+              </a:spcAft>
+              <a:buSzPct val="100000"/>
               <a:buChar char="•"/>
               <a:lnSpc>
                 <a:spcPts val="2200"/>
@@ -18367,10 +18645,12 @@
           </a:bodyPr>
           <a:lstStyle/>
           <a:p>
-            <a:pPr>
-              <a:spcAft>
-                <a:spcPts val="1000"/>
-              </a:spcAft>
+            <a:pPr lvl="0" marL="457200" indent="-228600">
+              <a:buFont typeface="Calibri"/>
+              <a:spcAft>
+                <a:spcPts val="1000"/>
+              </a:spcAft>
+              <a:buSzPct val="100000"/>
               <a:buChar char="•"/>
               <a:lnSpc>
                 <a:spcPts val="2200"/>
@@ -18387,10 +18667,12 @@
             </a:r>
           </a:p>
           <a:p>
-            <a:pPr>
-              <a:spcAft>
-                <a:spcPts val="1000"/>
-              </a:spcAft>
+            <a:pPr lvl="0" marL="457200" indent="-228600">
+              <a:buFont typeface="Calibri"/>
+              <a:spcAft>
+                <a:spcPts val="1000"/>
+              </a:spcAft>
+              <a:buSzPct val="100000"/>
               <a:buChar char="•"/>
               <a:lnSpc>
                 <a:spcPts val="2200"/>
@@ -18407,10 +18689,12 @@
             </a:r>
           </a:p>
           <a:p>
-            <a:pPr>
-              <a:spcAft>
-                <a:spcPts val="1000"/>
-              </a:spcAft>
+            <a:pPr lvl="0" marL="457200" indent="-228600">
+              <a:buFont typeface="Calibri"/>
+              <a:spcAft>
+                <a:spcPts val="1000"/>
+              </a:spcAft>
+              <a:buSzPct val="100000"/>
               <a:buChar char="•"/>
               <a:lnSpc>
                 <a:spcPts val="2200"/>
@@ -18546,10 +18830,12 @@
           </a:bodyPr>
           <a:lstStyle/>
           <a:p>
-            <a:pPr>
-              <a:spcAft>
-                <a:spcPts val="1000"/>
-              </a:spcAft>
+            <a:pPr lvl="0" marL="457200" indent="-228600">
+              <a:buFont typeface="Calibri"/>
+              <a:spcAft>
+                <a:spcPts val="1000"/>
+              </a:spcAft>
+              <a:buSzPct val="100000"/>
               <a:buChar char="•"/>
               <a:lnSpc>
                 <a:spcPts val="2200"/>
@@ -18566,10 +18852,12 @@
             </a:r>
           </a:p>
           <a:p>
-            <a:pPr>
-              <a:spcAft>
-                <a:spcPts val="1000"/>
-              </a:spcAft>
+            <a:pPr lvl="0" marL="457200" indent="-228600">
+              <a:buFont typeface="Calibri"/>
+              <a:spcAft>
+                <a:spcPts val="1000"/>
+              </a:spcAft>
+              <a:buSzPct val="100000"/>
               <a:buChar char="•"/>
               <a:lnSpc>
                 <a:spcPts val="2200"/>
@@ -18586,10 +18874,12 @@
             </a:r>
           </a:p>
           <a:p>
-            <a:pPr>
-              <a:spcAft>
-                <a:spcPts val="1000"/>
-              </a:spcAft>
+            <a:pPr lvl="0" marL="457200" indent="-228600">
+              <a:buFont typeface="Calibri"/>
+              <a:spcAft>
+                <a:spcPts val="1000"/>
+              </a:spcAft>
+              <a:buSzPct val="100000"/>
               <a:buChar char="•"/>
               <a:lnSpc>
                 <a:spcPts val="2200"/>
@@ -18606,10 +18896,12 @@
             </a:r>
           </a:p>
           <a:p>
-            <a:pPr>
-              <a:spcAft>
-                <a:spcPts val="1000"/>
-              </a:spcAft>
+            <a:pPr lvl="0" marL="457200" indent="-228600">
+              <a:buFont typeface="Calibri"/>
+              <a:spcAft>
+                <a:spcPts val="1000"/>
+              </a:spcAft>
+              <a:buSzPct val="100000"/>
               <a:buChar char="•"/>
               <a:lnSpc>
                 <a:spcPts val="2200"/>
@@ -18626,10 +18918,12 @@
             </a:r>
           </a:p>
           <a:p>
-            <a:pPr>
-              <a:spcAft>
-                <a:spcPts val="1000"/>
-              </a:spcAft>
+            <a:pPr lvl="0" marL="457200" indent="-228600">
+              <a:buFont typeface="Calibri"/>
+              <a:spcAft>
+                <a:spcPts val="1000"/>
+              </a:spcAft>
+              <a:buSzPct val="100000"/>
               <a:buChar char="•"/>
               <a:lnSpc>
                 <a:spcPts val="2200"/>
@@ -18765,10 +19059,12 @@
           </a:bodyPr>
           <a:lstStyle/>
           <a:p>
-            <a:pPr>
-              <a:spcAft>
-                <a:spcPts val="1000"/>
-              </a:spcAft>
+            <a:pPr lvl="0" marL="457200" indent="-228600">
+              <a:buFont typeface="Calibri"/>
+              <a:spcAft>
+                <a:spcPts val="1000"/>
+              </a:spcAft>
+              <a:buSzPct val="100000"/>
               <a:buChar char="•"/>
               <a:lnSpc>
                 <a:spcPts val="2200"/>
@@ -18785,10 +19081,12 @@
             </a:r>
           </a:p>
           <a:p>
-            <a:pPr>
-              <a:spcAft>
-                <a:spcPts val="1000"/>
-              </a:spcAft>
+            <a:pPr lvl="0" marL="457200" indent="-228600">
+              <a:buFont typeface="Calibri"/>
+              <a:spcAft>
+                <a:spcPts val="1000"/>
+              </a:spcAft>
+              <a:buSzPct val="100000"/>
               <a:buChar char="•"/>
               <a:lnSpc>
                 <a:spcPts val="2200"/>
@@ -18805,10 +19103,12 @@
             </a:r>
           </a:p>
           <a:p>
-            <a:pPr>
-              <a:spcAft>
-                <a:spcPts val="1000"/>
-              </a:spcAft>
+            <a:pPr lvl="0" marL="457200" indent="-228600">
+              <a:buFont typeface="Calibri"/>
+              <a:spcAft>
+                <a:spcPts val="1000"/>
+              </a:spcAft>
+              <a:buSzPct val="100000"/>
               <a:buChar char="•"/>
               <a:lnSpc>
                 <a:spcPts val="2200"/>
@@ -18825,10 +19125,12 @@
             </a:r>
           </a:p>
           <a:p>
-            <a:pPr>
-              <a:spcAft>
-                <a:spcPts val="1000"/>
-              </a:spcAft>
+            <a:pPr lvl="0" marL="457200" indent="-228600">
+              <a:buFont typeface="Calibri"/>
+              <a:spcAft>
+                <a:spcPts val="1000"/>
+              </a:spcAft>
+              <a:buSzPct val="100000"/>
               <a:buChar char="•"/>
               <a:lnSpc>
                 <a:spcPts val="2200"/>
@@ -18845,10 +19147,12 @@
             </a:r>
           </a:p>
           <a:p>
-            <a:pPr>
-              <a:spcAft>
-                <a:spcPts val="1000"/>
-              </a:spcAft>
+            <a:pPr lvl="0" marL="457200" indent="-228600">
+              <a:buFont typeface="Calibri"/>
+              <a:spcAft>
+                <a:spcPts val="1000"/>
+              </a:spcAft>
+              <a:buSzPct val="100000"/>
               <a:buChar char="•"/>
               <a:lnSpc>
                 <a:spcPts val="2200"/>
@@ -18984,10 +19288,12 @@
           </a:bodyPr>
           <a:lstStyle/>
           <a:p>
-            <a:pPr>
-              <a:spcAft>
-                <a:spcPts val="1000"/>
-              </a:spcAft>
+            <a:pPr lvl="0" marL="457200" indent="-228600">
+              <a:buFont typeface="Calibri"/>
+              <a:spcAft>
+                <a:spcPts val="1000"/>
+              </a:spcAft>
+              <a:buSzPct val="100000"/>
               <a:buChar char="•"/>
               <a:lnSpc>
                 <a:spcPts val="2200"/>
@@ -19004,10 +19310,12 @@
             </a:r>
           </a:p>
           <a:p>
-            <a:pPr>
-              <a:spcAft>
-                <a:spcPts val="1000"/>
-              </a:spcAft>
+            <a:pPr lvl="0" marL="457200" indent="-228600">
+              <a:buFont typeface="Calibri"/>
+              <a:spcAft>
+                <a:spcPts val="1000"/>
+              </a:spcAft>
+              <a:buSzPct val="100000"/>
               <a:buChar char="•"/>
               <a:lnSpc>
                 <a:spcPts val="2200"/>
@@ -19024,10 +19332,12 @@
             </a:r>
           </a:p>
           <a:p>
-            <a:pPr>
-              <a:spcAft>
-                <a:spcPts val="1000"/>
-              </a:spcAft>
+            <a:pPr lvl="0" marL="457200" indent="-228600">
+              <a:buFont typeface="Calibri"/>
+              <a:spcAft>
+                <a:spcPts val="1000"/>
+              </a:spcAft>
+              <a:buSzPct val="100000"/>
               <a:buChar char="•"/>
               <a:lnSpc>
                 <a:spcPts val="2200"/>
@@ -19044,10 +19354,12 @@
             </a:r>
           </a:p>
           <a:p>
-            <a:pPr>
-              <a:spcAft>
-                <a:spcPts val="1000"/>
-              </a:spcAft>
+            <a:pPr lvl="0" marL="457200" indent="-228600">
+              <a:buFont typeface="Calibri"/>
+              <a:spcAft>
+                <a:spcPts val="1000"/>
+              </a:spcAft>
+              <a:buSzPct val="100000"/>
               <a:buChar char="•"/>
               <a:lnSpc>
                 <a:spcPts val="2200"/>
@@ -19064,10 +19376,12 @@
             </a:r>
           </a:p>
           <a:p>
-            <a:pPr>
-              <a:spcAft>
-                <a:spcPts val="1000"/>
-              </a:spcAft>
+            <a:pPr lvl="0" marL="457200" indent="-228600">
+              <a:buFont typeface="Calibri"/>
+              <a:spcAft>
+                <a:spcPts val="1000"/>
+              </a:spcAft>
+              <a:buSzPct val="100000"/>
               <a:buChar char="•"/>
               <a:lnSpc>
                 <a:spcPts val="2200"/>
@@ -19203,10 +19517,12 @@
           </a:bodyPr>
           <a:lstStyle/>
           <a:p>
-            <a:pPr>
-              <a:spcAft>
-                <a:spcPts val="1000"/>
-              </a:spcAft>
+            <a:pPr lvl="0" marL="457200" indent="-228600">
+              <a:buFont typeface="Calibri"/>
+              <a:spcAft>
+                <a:spcPts val="1000"/>
+              </a:spcAft>
+              <a:buSzPct val="100000"/>
               <a:buChar char="•"/>
               <a:lnSpc>
                 <a:spcPts val="2200"/>
@@ -19223,10 +19539,12 @@
             </a:r>
           </a:p>
           <a:p>
-            <a:pPr>
-              <a:spcAft>
-                <a:spcPts val="1000"/>
-              </a:spcAft>
+            <a:pPr lvl="0" marL="457200" indent="-228600">
+              <a:buFont typeface="Calibri"/>
+              <a:spcAft>
+                <a:spcPts val="1000"/>
+              </a:spcAft>
+              <a:buSzPct val="100000"/>
               <a:buChar char="•"/>
               <a:lnSpc>
                 <a:spcPts val="2200"/>
@@ -19243,10 +19561,12 @@
             </a:r>
           </a:p>
           <a:p>
-            <a:pPr>
-              <a:spcAft>
-                <a:spcPts val="1000"/>
-              </a:spcAft>
+            <a:pPr lvl="0" marL="457200" indent="-228600">
+              <a:buFont typeface="Calibri"/>
+              <a:spcAft>
+                <a:spcPts val="1000"/>
+              </a:spcAft>
+              <a:buSzPct val="100000"/>
               <a:buChar char="•"/>
               <a:lnSpc>
                 <a:spcPts val="2200"/>
@@ -19263,10 +19583,12 @@
             </a:r>
           </a:p>
           <a:p>
-            <a:pPr>
-              <a:spcAft>
-                <a:spcPts val="1000"/>
-              </a:spcAft>
+            <a:pPr lvl="0" marL="457200" indent="-228600">
+              <a:buFont typeface="Calibri"/>
+              <a:spcAft>
+                <a:spcPts val="1000"/>
+              </a:spcAft>
+              <a:buSzPct val="100000"/>
               <a:buChar char="•"/>
               <a:lnSpc>
                 <a:spcPts val="2200"/>
@@ -19283,10 +19605,12 @@
             </a:r>
           </a:p>
           <a:p>
-            <a:pPr>
-              <a:spcAft>
-                <a:spcPts val="1000"/>
-              </a:spcAft>
+            <a:pPr lvl="0" marL="457200" indent="-228600">
+              <a:buFont typeface="Calibri"/>
+              <a:spcAft>
+                <a:spcPts val="1000"/>
+              </a:spcAft>
+              <a:buSzPct val="100000"/>
               <a:buChar char="•"/>
               <a:lnSpc>
                 <a:spcPts val="2200"/>
@@ -19422,10 +19746,12 @@
           </a:bodyPr>
           <a:lstStyle/>
           <a:p>
-            <a:pPr>
-              <a:spcAft>
-                <a:spcPts val="1000"/>
-              </a:spcAft>
+            <a:pPr lvl="0" marL="457200" indent="-228600">
+              <a:buFont typeface="Calibri"/>
+              <a:spcAft>
+                <a:spcPts val="1000"/>
+              </a:spcAft>
+              <a:buSzPct val="100000"/>
               <a:buChar char="•"/>
               <a:lnSpc>
                 <a:spcPts val="2200"/>
@@ -19442,10 +19768,12 @@
             </a:r>
           </a:p>
           <a:p>
-            <a:pPr>
-              <a:spcAft>
-                <a:spcPts val="1000"/>
-              </a:spcAft>
+            <a:pPr lvl="0" marL="457200" indent="-228600">
+              <a:buFont typeface="Calibri"/>
+              <a:spcAft>
+                <a:spcPts val="1000"/>
+              </a:spcAft>
+              <a:buSzPct val="100000"/>
               <a:buChar char="•"/>
               <a:lnSpc>
                 <a:spcPts val="2200"/>
@@ -19462,10 +19790,12 @@
             </a:r>
           </a:p>
           <a:p>
-            <a:pPr>
-              <a:spcAft>
-                <a:spcPts val="1000"/>
-              </a:spcAft>
+            <a:pPr lvl="0" marL="457200" indent="-228600">
+              <a:buFont typeface="Calibri"/>
+              <a:spcAft>
+                <a:spcPts val="1000"/>
+              </a:spcAft>
+              <a:buSzPct val="100000"/>
               <a:buChar char="•"/>
               <a:lnSpc>
                 <a:spcPts val="2200"/>
@@ -19601,10 +19931,12 @@
           </a:bodyPr>
           <a:lstStyle/>
           <a:p>
-            <a:pPr>
-              <a:spcAft>
-                <a:spcPts val="1000"/>
-              </a:spcAft>
+            <a:pPr lvl="0" marL="457200" indent="-228600">
+              <a:buFont typeface="Calibri"/>
+              <a:spcAft>
+                <a:spcPts val="1000"/>
+              </a:spcAft>
+              <a:buSzPct val="100000"/>
               <a:buChar char="•"/>
               <a:lnSpc>
                 <a:spcPts val="2200"/>
@@ -19621,10 +19953,12 @@
             </a:r>
           </a:p>
           <a:p>
-            <a:pPr>
-              <a:spcAft>
-                <a:spcPts val="1000"/>
-              </a:spcAft>
+            <a:pPr lvl="0" marL="457200" indent="-228600">
+              <a:buFont typeface="Calibri"/>
+              <a:spcAft>
+                <a:spcPts val="1000"/>
+              </a:spcAft>
+              <a:buSzPct val="100000"/>
               <a:buChar char="•"/>
               <a:lnSpc>
                 <a:spcPts val="2200"/>
@@ -19641,10 +19975,12 @@
             </a:r>
           </a:p>
           <a:p>
-            <a:pPr>
-              <a:spcAft>
-                <a:spcPts val="1000"/>
-              </a:spcAft>
+            <a:pPr lvl="0" marL="457200" indent="-228600">
+              <a:buFont typeface="Calibri"/>
+              <a:spcAft>
+                <a:spcPts val="1000"/>
+              </a:spcAft>
+              <a:buSzPct val="100000"/>
               <a:buChar char="•"/>
               <a:lnSpc>
                 <a:spcPts val="2200"/>
@@ -19661,10 +19997,12 @@
             </a:r>
           </a:p>
           <a:p>
-            <a:pPr>
-              <a:spcAft>
-                <a:spcPts val="1000"/>
-              </a:spcAft>
+            <a:pPr lvl="0" marL="457200" indent="-228600">
+              <a:buFont typeface="Calibri"/>
+              <a:spcAft>
+                <a:spcPts val="1000"/>
+              </a:spcAft>
+              <a:buSzPct val="100000"/>
               <a:buChar char="•"/>
               <a:lnSpc>
                 <a:spcPts val="2200"/>
@@ -19681,10 +20019,12 @@
             </a:r>
           </a:p>
           <a:p>
-            <a:pPr>
-              <a:spcAft>
-                <a:spcPts val="1000"/>
-              </a:spcAft>
+            <a:pPr lvl="0" marL="457200" indent="-228600">
+              <a:buFont typeface="Calibri"/>
+              <a:spcAft>
+                <a:spcPts val="1000"/>
+              </a:spcAft>
+              <a:buSzPct val="100000"/>
               <a:buChar char="•"/>
               <a:lnSpc>
                 <a:spcPts val="2200"/>
@@ -19820,10 +20160,12 @@
           </a:bodyPr>
           <a:lstStyle/>
           <a:p>
-            <a:pPr>
-              <a:spcAft>
-                <a:spcPts val="1000"/>
-              </a:spcAft>
+            <a:pPr lvl="0" marL="457200" indent="-228600">
+              <a:buFont typeface="Calibri"/>
+              <a:spcAft>
+                <a:spcPts val="1000"/>
+              </a:spcAft>
+              <a:buSzPct val="100000"/>
               <a:buChar char="•"/>
               <a:lnSpc>
                 <a:spcPts val="2200"/>
@@ -19840,10 +20182,12 @@
             </a:r>
           </a:p>
           <a:p>
-            <a:pPr>
-              <a:spcAft>
-                <a:spcPts val="1000"/>
-              </a:spcAft>
+            <a:pPr lvl="0" marL="457200" indent="-228600">
+              <a:buFont typeface="Calibri"/>
+              <a:spcAft>
+                <a:spcPts val="1000"/>
+              </a:spcAft>
+              <a:buSzPct val="100000"/>
               <a:buChar char="•"/>
               <a:lnSpc>
                 <a:spcPts val="2200"/>
@@ -19979,10 +20323,12 @@
           </a:bodyPr>
           <a:lstStyle/>
           <a:p>
-            <a:pPr>
-              <a:spcAft>
-                <a:spcPts val="1000"/>
-              </a:spcAft>
+            <a:pPr lvl="0" marL="457200" indent="-228600">
+              <a:buFont typeface="Calibri"/>
+              <a:spcAft>
+                <a:spcPts val="1000"/>
+              </a:spcAft>
+              <a:buSzPct val="100000"/>
               <a:buChar char="•"/>
               <a:lnSpc>
                 <a:spcPts val="2200"/>
@@ -20118,10 +20464,12 @@
           </a:bodyPr>
           <a:lstStyle/>
           <a:p>
-            <a:pPr>
-              <a:spcAft>
-                <a:spcPts val="1000"/>
-              </a:spcAft>
+            <a:pPr lvl="0" marL="457200" indent="-228600">
+              <a:buFont typeface="Calibri"/>
+              <a:spcAft>
+                <a:spcPts val="1000"/>
+              </a:spcAft>
+              <a:buSzPct val="100000"/>
               <a:buChar char="•"/>
               <a:lnSpc>
                 <a:spcPts val="2200"/>
@@ -20138,10 +20486,12 @@
             </a:r>
           </a:p>
           <a:p>
-            <a:pPr>
-              <a:spcAft>
-                <a:spcPts val="1000"/>
-              </a:spcAft>
+            <a:pPr lvl="0" marL="457200" indent="-228600">
+              <a:buFont typeface="Calibri"/>
+              <a:spcAft>
+                <a:spcPts val="1000"/>
+              </a:spcAft>
+              <a:buSzPct val="100000"/>
               <a:buChar char="•"/>
               <a:lnSpc>
                 <a:spcPts val="2200"/>
@@ -20277,10 +20627,12 @@
           </a:bodyPr>
           <a:lstStyle/>
           <a:p>
-            <a:pPr>
-              <a:spcAft>
-                <a:spcPts val="1000"/>
-              </a:spcAft>
+            <a:pPr lvl="0" marL="457200" indent="-228600">
+              <a:buFont typeface="Calibri"/>
+              <a:spcAft>
+                <a:spcPts val="1000"/>
+              </a:spcAft>
+              <a:buSzPct val="100000"/>
               <a:buChar char="•"/>
               <a:lnSpc>
                 <a:spcPts val="2200"/>
@@ -20297,10 +20649,12 @@
             </a:r>
           </a:p>
           <a:p>
-            <a:pPr>
-              <a:spcAft>
-                <a:spcPts val="1000"/>
-              </a:spcAft>
+            <a:pPr lvl="0" marL="457200" indent="-228600">
+              <a:buFont typeface="Calibri"/>
+              <a:spcAft>
+                <a:spcPts val="1000"/>
+              </a:spcAft>
+              <a:buSzPct val="100000"/>
               <a:buChar char="•"/>
               <a:lnSpc>
                 <a:spcPts val="2200"/>
@@ -20317,10 +20671,12 @@
             </a:r>
           </a:p>
           <a:p>
-            <a:pPr>
-              <a:spcAft>
-                <a:spcPts val="1000"/>
-              </a:spcAft>
+            <a:pPr lvl="0" marL="457200" indent="-228600">
+              <a:buFont typeface="Calibri"/>
+              <a:spcAft>
+                <a:spcPts val="1000"/>
+              </a:spcAft>
+              <a:buSzPct val="100000"/>
               <a:buChar char="•"/>
               <a:lnSpc>
                 <a:spcPts val="2200"/>
@@ -20456,10 +20812,12 @@
           </a:bodyPr>
           <a:lstStyle/>
           <a:p>
-            <a:pPr>
-              <a:spcAft>
-                <a:spcPts val="1000"/>
-              </a:spcAft>
+            <a:pPr lvl="0" marL="457200" indent="-228600">
+              <a:buFont typeface="Calibri"/>
+              <a:spcAft>
+                <a:spcPts val="1000"/>
+              </a:spcAft>
+              <a:buSzPct val="100000"/>
               <a:buChar char="•"/>
               <a:lnSpc>
                 <a:spcPts val="2200"/>
@@ -20476,10 +20834,12 @@
             </a:r>
           </a:p>
           <a:p>
-            <a:pPr>
-              <a:spcAft>
-                <a:spcPts val="1000"/>
-              </a:spcAft>
+            <a:pPr lvl="0" marL="457200" indent="-228600">
+              <a:buFont typeface="Calibri"/>
+              <a:spcAft>
+                <a:spcPts val="1000"/>
+              </a:spcAft>
+              <a:buSzPct val="100000"/>
               <a:buChar char="•"/>
               <a:lnSpc>
                 <a:spcPts val="2200"/>
@@ -20496,10 +20856,12 @@
             </a:r>
           </a:p>
           <a:p>
-            <a:pPr>
-              <a:spcAft>
-                <a:spcPts val="1000"/>
-              </a:spcAft>
+            <a:pPr lvl="0" marL="457200" indent="-228600">
+              <a:buFont typeface="Calibri"/>
+              <a:spcAft>
+                <a:spcPts val="1000"/>
+              </a:spcAft>
+              <a:buSzPct val="100000"/>
               <a:buChar char="•"/>
               <a:lnSpc>
                 <a:spcPts val="2200"/>
@@ -20516,10 +20878,12 @@
             </a:r>
           </a:p>
           <a:p>
-            <a:pPr>
-              <a:spcAft>
-                <a:spcPts val="1000"/>
-              </a:spcAft>
+            <a:pPr lvl="0" marL="457200" indent="-228600">
+              <a:buFont typeface="Calibri"/>
+              <a:spcAft>
+                <a:spcPts val="1000"/>
+              </a:spcAft>
+              <a:buSzPct val="100000"/>
               <a:buChar char="•"/>
               <a:lnSpc>
                 <a:spcPts val="2200"/>
@@ -20536,10 +20900,12 @@
             </a:r>
           </a:p>
           <a:p>
-            <a:pPr>
-              <a:spcAft>
-                <a:spcPts val="1000"/>
-              </a:spcAft>
+            <a:pPr lvl="0" marL="457200" indent="-228600">
+              <a:buFont typeface="Calibri"/>
+              <a:spcAft>
+                <a:spcPts val="1000"/>
+              </a:spcAft>
+              <a:buSzPct val="100000"/>
               <a:buChar char="•"/>
               <a:lnSpc>
                 <a:spcPts val="2200"/>
@@ -20675,10 +21041,12 @@
           </a:bodyPr>
           <a:lstStyle/>
           <a:p>
-            <a:pPr>
-              <a:spcAft>
-                <a:spcPts val="1000"/>
-              </a:spcAft>
+            <a:pPr lvl="0" marL="457200" indent="-228600">
+              <a:buFont typeface="Calibri"/>
+              <a:spcAft>
+                <a:spcPts val="1000"/>
+              </a:spcAft>
+              <a:buSzPct val="100000"/>
               <a:buChar char="•"/>
               <a:lnSpc>
                 <a:spcPts val="2200"/>
@@ -20695,10 +21063,12 @@
             </a:r>
           </a:p>
           <a:p>
-            <a:pPr>
-              <a:spcAft>
-                <a:spcPts val="1000"/>
-              </a:spcAft>
+            <a:pPr lvl="0" marL="457200" indent="-228600">
+              <a:buFont typeface="Calibri"/>
+              <a:spcAft>
+                <a:spcPts val="1000"/>
+              </a:spcAft>
+              <a:buSzPct val="100000"/>
               <a:buChar char="•"/>
               <a:lnSpc>
                 <a:spcPts val="2200"/>
@@ -20715,10 +21085,12 @@
             </a:r>
           </a:p>
           <a:p>
-            <a:pPr>
-              <a:spcAft>
-                <a:spcPts val="1000"/>
-              </a:spcAft>
+            <a:pPr lvl="0" marL="457200" indent="-228600">
+              <a:buFont typeface="Calibri"/>
+              <a:spcAft>
+                <a:spcPts val="1000"/>
+              </a:spcAft>
+              <a:buSzPct val="100000"/>
               <a:buChar char="•"/>
               <a:lnSpc>
                 <a:spcPts val="2200"/>
@@ -20735,10 +21107,12 @@
             </a:r>
           </a:p>
           <a:p>
-            <a:pPr>
-              <a:spcAft>
-                <a:spcPts val="1000"/>
-              </a:spcAft>
+            <a:pPr lvl="0" marL="457200" indent="-228600">
+              <a:buFont typeface="Calibri"/>
+              <a:spcAft>
+                <a:spcPts val="1000"/>
+              </a:spcAft>
+              <a:buSzPct val="100000"/>
               <a:buChar char="•"/>
               <a:lnSpc>
                 <a:spcPts val="2200"/>
@@ -20874,10 +21248,12 @@
           </a:bodyPr>
           <a:lstStyle/>
           <a:p>
-            <a:pPr>
-              <a:spcAft>
-                <a:spcPts val="1000"/>
-              </a:spcAft>
+            <a:pPr lvl="0" marL="457200" indent="-228600">
+              <a:buFont typeface="Calibri"/>
+              <a:spcAft>
+                <a:spcPts val="1000"/>
+              </a:spcAft>
+              <a:buSzPct val="100000"/>
               <a:buChar char="•"/>
               <a:lnSpc>
                 <a:spcPts val="2200"/>
@@ -20894,10 +21270,12 @@
             </a:r>
           </a:p>
           <a:p>
-            <a:pPr>
-              <a:spcAft>
-                <a:spcPts val="1000"/>
-              </a:spcAft>
+            <a:pPr lvl="0" marL="457200" indent="-228600">
+              <a:buFont typeface="Calibri"/>
+              <a:spcAft>
+                <a:spcPts val="1000"/>
+              </a:spcAft>
+              <a:buSzPct val="100000"/>
               <a:buChar char="•"/>
               <a:lnSpc>
                 <a:spcPts val="2200"/>
@@ -21033,10 +21411,12 @@
           </a:bodyPr>
           <a:lstStyle/>
           <a:p>
-            <a:pPr>
-              <a:spcAft>
-                <a:spcPts val="1000"/>
-              </a:spcAft>
+            <a:pPr lvl="0" marL="457200" indent="-228600">
+              <a:buFont typeface="Calibri"/>
+              <a:spcAft>
+                <a:spcPts val="1000"/>
+              </a:spcAft>
+              <a:buSzPct val="100000"/>
               <a:buChar char="•"/>
               <a:lnSpc>
                 <a:spcPts val="2200"/>
@@ -21053,10 +21433,12 @@
             </a:r>
           </a:p>
           <a:p>
-            <a:pPr>
-              <a:spcAft>
-                <a:spcPts val="1000"/>
-              </a:spcAft>
+            <a:pPr lvl="0" marL="457200" indent="-228600">
+              <a:buFont typeface="Calibri"/>
+              <a:spcAft>
+                <a:spcPts val="1000"/>
+              </a:spcAft>
+              <a:buSzPct val="100000"/>
               <a:buChar char="•"/>
               <a:lnSpc>
                 <a:spcPts val="2200"/>
@@ -21192,10 +21574,12 @@
           </a:bodyPr>
           <a:lstStyle/>
           <a:p>
-            <a:pPr>
-              <a:spcAft>
-                <a:spcPts val="1000"/>
-              </a:spcAft>
+            <a:pPr lvl="0" marL="457200" indent="-228600">
+              <a:buFont typeface="Calibri"/>
+              <a:spcAft>
+                <a:spcPts val="1000"/>
+              </a:spcAft>
+              <a:buSzPct val="100000"/>
               <a:buChar char="•"/>
               <a:lnSpc>
                 <a:spcPts val="2200"/>
@@ -21212,10 +21596,12 @@
             </a:r>
           </a:p>
           <a:p>
-            <a:pPr>
-              <a:spcAft>
-                <a:spcPts val="1000"/>
-              </a:spcAft>
+            <a:pPr lvl="0" marL="457200" indent="-228600">
+              <a:buFont typeface="Calibri"/>
+              <a:spcAft>
+                <a:spcPts val="1000"/>
+              </a:spcAft>
+              <a:buSzPct val="100000"/>
               <a:buChar char="•"/>
               <a:lnSpc>
                 <a:spcPts val="2200"/>
@@ -21232,10 +21618,12 @@
             </a:r>
           </a:p>
           <a:p>
-            <a:pPr>
-              <a:spcAft>
-                <a:spcPts val="1000"/>
-              </a:spcAft>
+            <a:pPr lvl="0" marL="457200" indent="-228600">
+              <a:buFont typeface="Calibri"/>
+              <a:spcAft>
+                <a:spcPts val="1000"/>
+              </a:spcAft>
+              <a:buSzPct val="100000"/>
               <a:buChar char="•"/>
               <a:lnSpc>
                 <a:spcPts val="2200"/>
@@ -21252,10 +21640,12 @@
             </a:r>
           </a:p>
           <a:p>
-            <a:pPr>
-              <a:spcAft>
-                <a:spcPts val="1000"/>
-              </a:spcAft>
+            <a:pPr lvl="0" marL="457200" indent="-228600">
+              <a:buFont typeface="Calibri"/>
+              <a:spcAft>
+                <a:spcPts val="1000"/>
+              </a:spcAft>
+              <a:buSzPct val="100000"/>
               <a:buChar char="•"/>
               <a:lnSpc>
                 <a:spcPts val="2200"/>
@@ -21391,10 +21781,12 @@
           </a:bodyPr>
           <a:lstStyle/>
           <a:p>
-            <a:pPr>
-              <a:spcAft>
-                <a:spcPts val="1000"/>
-              </a:spcAft>
+            <a:pPr lvl="0" marL="457200" indent="-228600">
+              <a:buFont typeface="Calibri"/>
+              <a:spcAft>
+                <a:spcPts val="1000"/>
+              </a:spcAft>
+              <a:buSzPct val="100000"/>
               <a:buChar char="•"/>
               <a:lnSpc>
                 <a:spcPts val="2200"/>
@@ -21411,10 +21803,12 @@
             </a:r>
           </a:p>
           <a:p>
-            <a:pPr>
-              <a:spcAft>
-                <a:spcPts val="1000"/>
-              </a:spcAft>
+            <a:pPr lvl="0" marL="457200" indent="-228600">
+              <a:buFont typeface="Calibri"/>
+              <a:spcAft>
+                <a:spcPts val="1000"/>
+              </a:spcAft>
+              <a:buSzPct val="100000"/>
               <a:buChar char="•"/>
               <a:lnSpc>
                 <a:spcPts val="2200"/>
@@ -21550,10 +21944,12 @@
           </a:bodyPr>
           <a:lstStyle/>
           <a:p>
-            <a:pPr>
-              <a:spcAft>
-                <a:spcPts val="1000"/>
-              </a:spcAft>
+            <a:pPr lvl="0" marL="457200" indent="-228600">
+              <a:buFont typeface="Calibri"/>
+              <a:spcAft>
+                <a:spcPts val="1000"/>
+              </a:spcAft>
+              <a:buSzPct val="100000"/>
               <a:buChar char="•"/>
               <a:lnSpc>
                 <a:spcPts val="2200"/>
@@ -21689,10 +22085,12 @@
           </a:bodyPr>
           <a:lstStyle/>
           <a:p>
-            <a:pPr>
-              <a:spcAft>
-                <a:spcPts val="1000"/>
-              </a:spcAft>
+            <a:pPr lvl="0" marL="457200" indent="-228600">
+              <a:buFont typeface="Calibri"/>
+              <a:spcAft>
+                <a:spcPts val="1000"/>
+              </a:spcAft>
+              <a:buSzPct val="100000"/>
               <a:buChar char="•"/>
               <a:lnSpc>
                 <a:spcPts val="2200"/>
@@ -21709,10 +22107,12 @@
             </a:r>
           </a:p>
           <a:p>
-            <a:pPr>
-              <a:spcAft>
-                <a:spcPts val="1000"/>
-              </a:spcAft>
+            <a:pPr lvl="0" marL="457200" indent="-228600">
+              <a:buFont typeface="Calibri"/>
+              <a:spcAft>
+                <a:spcPts val="1000"/>
+              </a:spcAft>
+              <a:buSzPct val="100000"/>
               <a:buChar char="•"/>
               <a:lnSpc>
                 <a:spcPts val="2200"/>
@@ -21729,10 +22129,12 @@
             </a:r>
           </a:p>
           <a:p>
-            <a:pPr>
-              <a:spcAft>
-                <a:spcPts val="1000"/>
-              </a:spcAft>
+            <a:pPr lvl="0" marL="457200" indent="-228600">
+              <a:buFont typeface="Calibri"/>
+              <a:spcAft>
+                <a:spcPts val="1000"/>
+              </a:spcAft>
+              <a:buSzPct val="100000"/>
               <a:buChar char="•"/>
               <a:lnSpc>
                 <a:spcPts val="2200"/>
@@ -21749,10 +22151,12 @@
             </a:r>
           </a:p>
           <a:p>
-            <a:pPr>
-              <a:spcAft>
-                <a:spcPts val="1000"/>
-              </a:spcAft>
+            <a:pPr lvl="0" marL="457200" indent="-228600">
+              <a:buFont typeface="Calibri"/>
+              <a:spcAft>
+                <a:spcPts val="1000"/>
+              </a:spcAft>
+              <a:buSzPct val="100000"/>
               <a:buChar char="•"/>
               <a:lnSpc>
                 <a:spcPts val="2200"/>
@@ -21888,10 +22292,12 @@
           </a:bodyPr>
           <a:lstStyle/>
           <a:p>
-            <a:pPr>
-              <a:spcAft>
-                <a:spcPts val="1000"/>
-              </a:spcAft>
+            <a:pPr lvl="0" marL="457200" indent="-228600">
+              <a:buFont typeface="Calibri"/>
+              <a:spcAft>
+                <a:spcPts val="1000"/>
+              </a:spcAft>
+              <a:buSzPct val="100000"/>
               <a:buChar char="•"/>
               <a:lnSpc>
                 <a:spcPts val="2200"/>
@@ -21908,10 +22314,12 @@
             </a:r>
           </a:p>
           <a:p>
-            <a:pPr>
-              <a:spcAft>
-                <a:spcPts val="1000"/>
-              </a:spcAft>
+            <a:pPr lvl="0" marL="457200" indent="-228600">
+              <a:buFont typeface="Calibri"/>
+              <a:spcAft>
+                <a:spcPts val="1000"/>
+              </a:spcAft>
+              <a:buSzPct val="100000"/>
               <a:buChar char="•"/>
               <a:lnSpc>
                 <a:spcPts val="2200"/>
@@ -21928,10 +22336,12 @@
             </a:r>
           </a:p>
           <a:p>
-            <a:pPr>
-              <a:spcAft>
-                <a:spcPts val="1000"/>
-              </a:spcAft>
+            <a:pPr lvl="0" marL="457200" indent="-228600">
+              <a:buFont typeface="Calibri"/>
+              <a:spcAft>
+                <a:spcPts val="1000"/>
+              </a:spcAft>
+              <a:buSzPct val="100000"/>
               <a:buChar char="•"/>
               <a:lnSpc>
                 <a:spcPts val="2200"/>
@@ -22067,10 +22477,12 @@
           </a:bodyPr>
           <a:lstStyle/>
           <a:p>
-            <a:pPr>
-              <a:spcAft>
-                <a:spcPts val="1000"/>
-              </a:spcAft>
+            <a:pPr lvl="0" marL="457200" indent="-228600">
+              <a:buFont typeface="Calibri"/>
+              <a:spcAft>
+                <a:spcPts val="1000"/>
+              </a:spcAft>
+              <a:buSzPct val="100000"/>
               <a:buChar char="•"/>
               <a:lnSpc>
                 <a:spcPts val="2200"/>
@@ -22087,10 +22499,12 @@
             </a:r>
           </a:p>
           <a:p>
-            <a:pPr>
-              <a:spcAft>
-                <a:spcPts val="1000"/>
-              </a:spcAft>
+            <a:pPr lvl="0" marL="457200" indent="-228600">
+              <a:buFont typeface="Calibri"/>
+              <a:spcAft>
+                <a:spcPts val="1000"/>
+              </a:spcAft>
+              <a:buSzPct val="100000"/>
               <a:buChar char="•"/>
               <a:lnSpc>
                 <a:spcPts val="2200"/>
@@ -22107,10 +22521,12 @@
             </a:r>
           </a:p>
           <a:p>
-            <a:pPr>
-              <a:spcAft>
-                <a:spcPts val="1000"/>
-              </a:spcAft>
+            <a:pPr lvl="0" marL="457200" indent="-228600">
+              <a:buFont typeface="Calibri"/>
+              <a:spcAft>
+                <a:spcPts val="1000"/>
+              </a:spcAft>
+              <a:buSzPct val="100000"/>
               <a:buChar char="•"/>
               <a:lnSpc>
                 <a:spcPts val="2200"/>
@@ -22127,10 +22543,12 @@
             </a:r>
           </a:p>
           <a:p>
-            <a:pPr>
-              <a:spcAft>
-                <a:spcPts val="1000"/>
-              </a:spcAft>
+            <a:pPr lvl="0" marL="457200" indent="-228600">
+              <a:buFont typeface="Calibri"/>
+              <a:spcAft>
+                <a:spcPts val="1000"/>
+              </a:spcAft>
+              <a:buSzPct val="100000"/>
               <a:buChar char="•"/>
               <a:lnSpc>
                 <a:spcPts val="2200"/>
@@ -22147,10 +22565,12 @@
             </a:r>
           </a:p>
           <a:p>
-            <a:pPr>
-              <a:spcAft>
-                <a:spcPts val="1000"/>
-              </a:spcAft>
+            <a:pPr lvl="0" marL="457200" indent="-228600">
+              <a:buFont typeface="Calibri"/>
+              <a:spcAft>
+                <a:spcPts val="1000"/>
+              </a:spcAft>
+              <a:buSzPct val="100000"/>
               <a:buChar char="•"/>
               <a:lnSpc>
                 <a:spcPts val="2200"/>
@@ -22167,10 +22587,12 @@
             </a:r>
           </a:p>
           <a:p>
-            <a:pPr>
-              <a:spcAft>
-                <a:spcPts val="1000"/>
-              </a:spcAft>
+            <a:pPr lvl="0" marL="457200" indent="-228600">
+              <a:buFont typeface="Calibri"/>
+              <a:spcAft>
+                <a:spcPts val="1000"/>
+              </a:spcAft>
+              <a:buSzPct val="100000"/>
               <a:buChar char="•"/>
               <a:lnSpc>
                 <a:spcPts val="2200"/>
@@ -22306,10 +22728,12 @@
           </a:bodyPr>
           <a:lstStyle/>
           <a:p>
-            <a:pPr>
-              <a:spcAft>
-                <a:spcPts val="1000"/>
-              </a:spcAft>
+            <a:pPr lvl="0" marL="457200" indent="-228600">
+              <a:buFont typeface="Calibri"/>
+              <a:spcAft>
+                <a:spcPts val="1000"/>
+              </a:spcAft>
+              <a:buSzPct val="100000"/>
               <a:buChar char="•"/>
               <a:lnSpc>
                 <a:spcPts val="2200"/>
@@ -22326,10 +22750,12 @@
             </a:r>
           </a:p>
           <a:p>
-            <a:pPr>
-              <a:spcAft>
-                <a:spcPts val="1000"/>
-              </a:spcAft>
+            <a:pPr lvl="0" marL="457200" indent="-228600">
+              <a:buFont typeface="Calibri"/>
+              <a:spcAft>
+                <a:spcPts val="1000"/>
+              </a:spcAft>
+              <a:buSzPct val="100000"/>
               <a:buChar char="•"/>
               <a:lnSpc>
                 <a:spcPts val="2200"/>
@@ -22346,10 +22772,12 @@
             </a:r>
           </a:p>
           <a:p>
-            <a:pPr>
-              <a:spcAft>
-                <a:spcPts val="1000"/>
-              </a:spcAft>
+            <a:pPr lvl="0" marL="457200" indent="-228600">
+              <a:buFont typeface="Calibri"/>
+              <a:spcAft>
+                <a:spcPts val="1000"/>
+              </a:spcAft>
+              <a:buSzPct val="100000"/>
               <a:buChar char="•"/>
               <a:lnSpc>
                 <a:spcPts val="2200"/>
@@ -22485,10 +22913,12 @@
           </a:bodyPr>
           <a:lstStyle/>
           <a:p>
-            <a:pPr>
-              <a:spcAft>
-                <a:spcPts val="1000"/>
-              </a:spcAft>
+            <a:pPr lvl="0" marL="457200" indent="-228600">
+              <a:buFont typeface="Calibri"/>
+              <a:spcAft>
+                <a:spcPts val="1000"/>
+              </a:spcAft>
+              <a:buSzPct val="100000"/>
               <a:buChar char="•"/>
               <a:lnSpc>
                 <a:spcPts val="2200"/>
@@ -22505,10 +22935,12 @@
             </a:r>
           </a:p>
           <a:p>
-            <a:pPr>
-              <a:spcAft>
-                <a:spcPts val="1000"/>
-              </a:spcAft>
+            <a:pPr lvl="0" marL="457200" indent="-228600">
+              <a:buFont typeface="Calibri"/>
+              <a:spcAft>
+                <a:spcPts val="1000"/>
+              </a:spcAft>
+              <a:buSzPct val="100000"/>
               <a:buChar char="•"/>
               <a:lnSpc>
                 <a:spcPts val="2200"/>
@@ -22525,10 +22957,12 @@
             </a:r>
           </a:p>
           <a:p>
-            <a:pPr>
-              <a:spcAft>
-                <a:spcPts val="1000"/>
-              </a:spcAft>
+            <a:pPr lvl="0" marL="457200" indent="-228600">
+              <a:buFont typeface="Calibri"/>
+              <a:spcAft>
+                <a:spcPts val="1000"/>
+              </a:spcAft>
+              <a:buSzPct val="100000"/>
               <a:buChar char="•"/>
               <a:lnSpc>
                 <a:spcPts val="2200"/>
@@ -22545,10 +22979,12 @@
             </a:r>
           </a:p>
           <a:p>
-            <a:pPr>
-              <a:spcAft>
-                <a:spcPts val="1000"/>
-              </a:spcAft>
+            <a:pPr lvl="0" marL="457200" indent="-228600">
+              <a:buFont typeface="Calibri"/>
+              <a:spcAft>
+                <a:spcPts val="1000"/>
+              </a:spcAft>
+              <a:buSzPct val="100000"/>
               <a:buChar char="•"/>
               <a:lnSpc>
                 <a:spcPts val="2200"/>
@@ -22565,10 +23001,12 @@
             </a:r>
           </a:p>
           <a:p>
-            <a:pPr>
-              <a:spcAft>
-                <a:spcPts val="1000"/>
-              </a:spcAft>
+            <a:pPr lvl="0" marL="457200" indent="-228600">
+              <a:buFont typeface="Calibri"/>
+              <a:spcAft>
+                <a:spcPts val="1000"/>
+              </a:spcAft>
+              <a:buSzPct val="100000"/>
               <a:buChar char="•"/>
               <a:lnSpc>
                 <a:spcPts val="2200"/>
@@ -22704,10 +23142,12 @@
           </a:bodyPr>
           <a:lstStyle/>
           <a:p>
-            <a:pPr>
-              <a:spcAft>
-                <a:spcPts val="1000"/>
-              </a:spcAft>
+            <a:pPr lvl="0" marL="457200" indent="-228600">
+              <a:buFont typeface="Calibri"/>
+              <a:spcAft>
+                <a:spcPts val="1000"/>
+              </a:spcAft>
+              <a:buSzPct val="100000"/>
               <a:buChar char="•"/>
               <a:lnSpc>
                 <a:spcPts val="2200"/>
@@ -22724,10 +23164,12 @@
             </a:r>
           </a:p>
           <a:p>
-            <a:pPr>
-              <a:spcAft>
-                <a:spcPts val="1000"/>
-              </a:spcAft>
+            <a:pPr lvl="0" marL="457200" indent="-228600">
+              <a:buFont typeface="Calibri"/>
+              <a:spcAft>
+                <a:spcPts val="1000"/>
+              </a:spcAft>
+              <a:buSzPct val="100000"/>
               <a:buChar char="•"/>
               <a:lnSpc>
                 <a:spcPts val="2200"/>
@@ -22744,10 +23186,12 @@
             </a:r>
           </a:p>
           <a:p>
-            <a:pPr>
-              <a:spcAft>
-                <a:spcPts val="1000"/>
-              </a:spcAft>
+            <a:pPr lvl="0" marL="457200" indent="-228600">
+              <a:buFont typeface="Calibri"/>
+              <a:spcAft>
+                <a:spcPts val="1000"/>
+              </a:spcAft>
+              <a:buSzPct val="100000"/>
               <a:buChar char="•"/>
               <a:lnSpc>
                 <a:spcPts val="2200"/>
@@ -22764,10 +23208,12 @@
             </a:r>
           </a:p>
           <a:p>
-            <a:pPr>
-              <a:spcAft>
-                <a:spcPts val="1000"/>
-              </a:spcAft>
+            <a:pPr lvl="0" marL="457200" indent="-228600">
+              <a:buFont typeface="Calibri"/>
+              <a:spcAft>
+                <a:spcPts val="1000"/>
+              </a:spcAft>
+              <a:buSzPct val="100000"/>
               <a:buChar char="•"/>
               <a:lnSpc>
                 <a:spcPts val="2200"/>
@@ -22784,10 +23230,12 @@
             </a:r>
           </a:p>
           <a:p>
-            <a:pPr>
-              <a:spcAft>
-                <a:spcPts val="1000"/>
-              </a:spcAft>
+            <a:pPr lvl="0" marL="457200" indent="-228600">
+              <a:buFont typeface="Calibri"/>
+              <a:spcAft>
+                <a:spcPts val="1000"/>
+              </a:spcAft>
+              <a:buSzPct val="100000"/>
               <a:buChar char="•"/>
               <a:lnSpc>
                 <a:spcPts val="2200"/>
@@ -22804,10 +23252,12 @@
             </a:r>
           </a:p>
           <a:p>
-            <a:pPr>
-              <a:spcAft>
-                <a:spcPts val="1000"/>
-              </a:spcAft>
+            <a:pPr lvl="0" marL="457200" indent="-228600">
+              <a:buFont typeface="Calibri"/>
+              <a:spcAft>
+                <a:spcPts val="1000"/>
+              </a:spcAft>
+              <a:buSzPct val="100000"/>
               <a:buChar char="•"/>
               <a:lnSpc>
                 <a:spcPts val="2200"/>
@@ -22943,10 +23393,12 @@
           </a:bodyPr>
           <a:lstStyle/>
           <a:p>
-            <a:pPr>
-              <a:spcAft>
-                <a:spcPts val="1000"/>
-              </a:spcAft>
+            <a:pPr lvl="0" marL="457200" indent="-228600">
+              <a:buFont typeface="Calibri"/>
+              <a:spcAft>
+                <a:spcPts val="1000"/>
+              </a:spcAft>
+              <a:buSzPct val="100000"/>
               <a:buChar char="•"/>
               <a:lnSpc>
                 <a:spcPts val="2200"/>
@@ -22963,10 +23415,12 @@
             </a:r>
           </a:p>
           <a:p>
-            <a:pPr>
-              <a:spcAft>
-                <a:spcPts val="1000"/>
-              </a:spcAft>
+            <a:pPr lvl="0" marL="457200" indent="-228600">
+              <a:buFont typeface="Calibri"/>
+              <a:spcAft>
+                <a:spcPts val="1000"/>
+              </a:spcAft>
+              <a:buSzPct val="100000"/>
               <a:buChar char="•"/>
               <a:lnSpc>
                 <a:spcPts val="2200"/>
@@ -22983,10 +23437,12 @@
             </a:r>
           </a:p>
           <a:p>
-            <a:pPr>
-              <a:spcAft>
-                <a:spcPts val="1000"/>
-              </a:spcAft>
+            <a:pPr lvl="0" marL="457200" indent="-228600">
+              <a:buFont typeface="Calibri"/>
+              <a:spcAft>
+                <a:spcPts val="1000"/>
+              </a:spcAft>
+              <a:buSzPct val="100000"/>
               <a:buChar char="•"/>
               <a:lnSpc>
                 <a:spcPts val="2200"/>
@@ -23003,10 +23459,12 @@
             </a:r>
           </a:p>
           <a:p>
-            <a:pPr>
-              <a:spcAft>
-                <a:spcPts val="1000"/>
-              </a:spcAft>
+            <a:pPr lvl="0" marL="457200" indent="-228600">
+              <a:buFont typeface="Calibri"/>
+              <a:spcAft>
+                <a:spcPts val="1000"/>
+              </a:spcAft>
+              <a:buSzPct val="100000"/>
               <a:buChar char="•"/>
               <a:lnSpc>
                 <a:spcPts val="2200"/>
@@ -23023,10 +23481,12 @@
             </a:r>
           </a:p>
           <a:p>
-            <a:pPr>
-              <a:spcAft>
-                <a:spcPts val="1000"/>
-              </a:spcAft>
+            <a:pPr lvl="0" marL="457200" indent="-228600">
+              <a:buFont typeface="Calibri"/>
+              <a:spcAft>
+                <a:spcPts val="1000"/>
+              </a:spcAft>
+              <a:buSzPct val="100000"/>
               <a:buChar char="•"/>
               <a:lnSpc>
                 <a:spcPts val="2200"/>
@@ -23043,10 +23503,12 @@
             </a:r>
           </a:p>
           <a:p>
-            <a:pPr>
-              <a:spcAft>
-                <a:spcPts val="1000"/>
-              </a:spcAft>
+            <a:pPr lvl="0" marL="457200" indent="-228600">
+              <a:buFont typeface="Calibri"/>
+              <a:spcAft>
+                <a:spcPts val="1000"/>
+              </a:spcAft>
+              <a:buSzPct val="100000"/>
               <a:buChar char="•"/>
               <a:lnSpc>
                 <a:spcPts val="2200"/>
@@ -23182,10 +23644,12 @@
           </a:bodyPr>
           <a:lstStyle/>
           <a:p>
-            <a:pPr>
-              <a:spcAft>
-                <a:spcPts val="1000"/>
-              </a:spcAft>
+            <a:pPr lvl="0" marL="457200" indent="-228600">
+              <a:buFont typeface="Calibri"/>
+              <a:spcAft>
+                <a:spcPts val="1000"/>
+              </a:spcAft>
+              <a:buSzPct val="100000"/>
               <a:buChar char="•"/>
               <a:lnSpc>
                 <a:spcPts val="2200"/>
@@ -23202,10 +23666,12 @@
             </a:r>
           </a:p>
           <a:p>
-            <a:pPr>
-              <a:spcAft>
-                <a:spcPts val="1000"/>
-              </a:spcAft>
+            <a:pPr lvl="0" marL="457200" indent="-228600">
+              <a:buFont typeface="Calibri"/>
+              <a:spcAft>
+                <a:spcPts val="1000"/>
+              </a:spcAft>
+              <a:buSzPct val="100000"/>
               <a:buChar char="•"/>
               <a:lnSpc>
                 <a:spcPts val="2200"/>
@@ -23222,10 +23688,12 @@
             </a:r>
           </a:p>
           <a:p>
-            <a:pPr>
-              <a:spcAft>
-                <a:spcPts val="1000"/>
-              </a:spcAft>
+            <a:pPr lvl="0" marL="457200" indent="-228600">
+              <a:buFont typeface="Calibri"/>
+              <a:spcAft>
+                <a:spcPts val="1000"/>
+              </a:spcAft>
+              <a:buSzPct val="100000"/>
               <a:buChar char="•"/>
               <a:lnSpc>
                 <a:spcPts val="2200"/>
@@ -23242,10 +23710,12 @@
             </a:r>
           </a:p>
           <a:p>
-            <a:pPr>
-              <a:spcAft>
-                <a:spcPts val="1000"/>
-              </a:spcAft>
+            <a:pPr lvl="0" marL="457200" indent="-228600">
+              <a:buFont typeface="Calibri"/>
+              <a:spcAft>
+                <a:spcPts val="1000"/>
+              </a:spcAft>
+              <a:buSzPct val="100000"/>
               <a:buChar char="•"/>
               <a:lnSpc>
                 <a:spcPts val="2200"/>
@@ -23262,10 +23732,12 @@
             </a:r>
           </a:p>
           <a:p>
-            <a:pPr>
-              <a:spcAft>
-                <a:spcPts val="1000"/>
-              </a:spcAft>
+            <a:pPr lvl="0" marL="457200" indent="-228600">
+              <a:buFont typeface="Calibri"/>
+              <a:spcAft>
+                <a:spcPts val="1000"/>
+              </a:spcAft>
+              <a:buSzPct val="100000"/>
               <a:buChar char="•"/>
               <a:lnSpc>
                 <a:spcPts val="2200"/>
@@ -23401,10 +23873,12 @@
           </a:bodyPr>
           <a:lstStyle/>
           <a:p>
-            <a:pPr>
-              <a:spcAft>
-                <a:spcPts val="1000"/>
-              </a:spcAft>
+            <a:pPr lvl="0" marL="457200" indent="-228600">
+              <a:buFont typeface="Calibri"/>
+              <a:spcAft>
+                <a:spcPts val="1000"/>
+              </a:spcAft>
+              <a:buSzPct val="100000"/>
               <a:buChar char="•"/>
               <a:lnSpc>
                 <a:spcPts val="2200"/>
@@ -23421,10 +23895,12 @@
             </a:r>
           </a:p>
           <a:p>
-            <a:pPr>
-              <a:spcAft>
-                <a:spcPts val="1000"/>
-              </a:spcAft>
+            <a:pPr lvl="0" marL="457200" indent="-228600">
+              <a:buFont typeface="Calibri"/>
+              <a:spcAft>
+                <a:spcPts val="1000"/>
+              </a:spcAft>
+              <a:buSzPct val="100000"/>
               <a:buChar char="•"/>
               <a:lnSpc>
                 <a:spcPts val="2200"/>
@@ -23560,10 +24036,12 @@
           </a:bodyPr>
           <a:lstStyle/>
           <a:p>
-            <a:pPr>
-              <a:spcAft>
-                <a:spcPts val="1000"/>
-              </a:spcAft>
+            <a:pPr lvl="0" marL="457200" indent="-228600">
+              <a:buFont typeface="Calibri"/>
+              <a:spcAft>
+                <a:spcPts val="1000"/>
+              </a:spcAft>
+              <a:buSzPct val="100000"/>
               <a:buChar char="•"/>
               <a:lnSpc>
                 <a:spcPts val="2200"/>
@@ -23699,10 +24177,12 @@
           </a:bodyPr>
           <a:lstStyle/>
           <a:p>
-            <a:pPr>
-              <a:spcAft>
-                <a:spcPts val="1000"/>
-              </a:spcAft>
+            <a:pPr lvl="0" marL="457200" indent="-228600">
+              <a:buFont typeface="Calibri"/>
+              <a:spcAft>
+                <a:spcPts val="1000"/>
+              </a:spcAft>
+              <a:buSzPct val="100000"/>
               <a:buChar char="•"/>
               <a:lnSpc>
                 <a:spcPts val="2200"/>
@@ -23719,10 +24199,12 @@
             </a:r>
           </a:p>
           <a:p>
-            <a:pPr>
-              <a:spcAft>
-                <a:spcPts val="1000"/>
-              </a:spcAft>
+            <a:pPr lvl="0" marL="457200" indent="-228600">
+              <a:buFont typeface="Calibri"/>
+              <a:spcAft>
+                <a:spcPts val="1000"/>
+              </a:spcAft>
+              <a:buSzPct val="100000"/>
               <a:buChar char="•"/>
               <a:lnSpc>
                 <a:spcPts val="2200"/>
@@ -23739,10 +24221,12 @@
             </a:r>
           </a:p>
           <a:p>
-            <a:pPr>
-              <a:spcAft>
-                <a:spcPts val="1000"/>
-              </a:spcAft>
+            <a:pPr lvl="0" marL="457200" indent="-228600">
+              <a:buFont typeface="Calibri"/>
+              <a:spcAft>
+                <a:spcPts val="1000"/>
+              </a:spcAft>
+              <a:buSzPct val="100000"/>
               <a:buChar char="•"/>
               <a:lnSpc>
                 <a:spcPts val="2200"/>
@@ -23878,10 +24362,12 @@
           </a:bodyPr>
           <a:lstStyle/>
           <a:p>
-            <a:pPr>
-              <a:spcAft>
-                <a:spcPts val="1000"/>
-              </a:spcAft>
+            <a:pPr lvl="0" marL="457200" indent="-228600">
+              <a:buFont typeface="Calibri"/>
+              <a:spcAft>
+                <a:spcPts val="1000"/>
+              </a:spcAft>
+              <a:buSzPct val="100000"/>
               <a:buChar char="•"/>
               <a:lnSpc>
                 <a:spcPts val="2200"/>
@@ -23898,10 +24384,12 @@
             </a:r>
           </a:p>
           <a:p>
-            <a:pPr>
-              <a:spcAft>
-                <a:spcPts val="1000"/>
-              </a:spcAft>
+            <a:pPr lvl="0" marL="457200" indent="-228600">
+              <a:buFont typeface="Calibri"/>
+              <a:spcAft>
+                <a:spcPts val="1000"/>
+              </a:spcAft>
+              <a:buSzPct val="100000"/>
               <a:buChar char="•"/>
               <a:lnSpc>
                 <a:spcPts val="2200"/>
@@ -23918,10 +24406,12 @@
             </a:r>
           </a:p>
           <a:p>
-            <a:pPr>
-              <a:spcAft>
-                <a:spcPts val="1000"/>
-              </a:spcAft>
+            <a:pPr lvl="0" marL="457200" indent="-228600">
+              <a:buFont typeface="Calibri"/>
+              <a:spcAft>
+                <a:spcPts val="1000"/>
+              </a:spcAft>
+              <a:buSzPct val="100000"/>
               <a:buChar char="•"/>
               <a:lnSpc>
                 <a:spcPts val="2200"/>
@@ -23938,10 +24428,12 @@
             </a:r>
           </a:p>
           <a:p>
-            <a:pPr>
-              <a:spcAft>
-                <a:spcPts val="1000"/>
-              </a:spcAft>
+            <a:pPr lvl="0" marL="457200" indent="-228600">
+              <a:buFont typeface="Calibri"/>
+              <a:spcAft>
+                <a:spcPts val="1000"/>
+              </a:spcAft>
+              <a:buSzPct val="100000"/>
               <a:buChar char="•"/>
               <a:lnSpc>
                 <a:spcPts val="2200"/>
@@ -23958,10 +24450,12 @@
             </a:r>
           </a:p>
           <a:p>
-            <a:pPr>
-              <a:spcAft>
-                <a:spcPts val="1000"/>
-              </a:spcAft>
+            <a:pPr lvl="0" marL="457200" indent="-228600">
+              <a:buFont typeface="Calibri"/>
+              <a:spcAft>
+                <a:spcPts val="1000"/>
+              </a:spcAft>
+              <a:buSzPct val="100000"/>
               <a:buChar char="•"/>
               <a:lnSpc>
                 <a:spcPts val="2200"/>
@@ -23978,10 +24472,12 @@
             </a:r>
           </a:p>
           <a:p>
-            <a:pPr>
-              <a:spcAft>
-                <a:spcPts val="1000"/>
-              </a:spcAft>
+            <a:pPr lvl="0" marL="457200" indent="-228600">
+              <a:buFont typeface="Calibri"/>
+              <a:spcAft>
+                <a:spcPts val="1000"/>
+              </a:spcAft>
+              <a:buSzPct val="100000"/>
               <a:buChar char="•"/>
               <a:lnSpc>
                 <a:spcPts val="2200"/>
@@ -24117,10 +24613,12 @@
           </a:bodyPr>
           <a:lstStyle/>
           <a:p>
-            <a:pPr>
-              <a:spcAft>
-                <a:spcPts val="1000"/>
-              </a:spcAft>
+            <a:pPr lvl="0" marL="457200" indent="-228600">
+              <a:buFont typeface="Calibri"/>
+              <a:spcAft>
+                <a:spcPts val="1000"/>
+              </a:spcAft>
+              <a:buSzPct val="100000"/>
               <a:buChar char="•"/>
               <a:lnSpc>
                 <a:spcPts val="2200"/>
@@ -24137,10 +24635,12 @@
             </a:r>
           </a:p>
           <a:p>
-            <a:pPr>
-              <a:spcAft>
-                <a:spcPts val="1000"/>
-              </a:spcAft>
+            <a:pPr lvl="0" marL="457200" indent="-228600">
+              <a:buFont typeface="Calibri"/>
+              <a:spcAft>
+                <a:spcPts val="1000"/>
+              </a:spcAft>
+              <a:buSzPct val="100000"/>
               <a:buChar char="•"/>
               <a:lnSpc>
                 <a:spcPts val="2200"/>
@@ -24157,10 +24657,12 @@
             </a:r>
           </a:p>
           <a:p>
-            <a:pPr>
-              <a:spcAft>
-                <a:spcPts val="1000"/>
-              </a:spcAft>
+            <a:pPr lvl="0" marL="457200" indent="-228600">
+              <a:buFont typeface="Calibri"/>
+              <a:spcAft>
+                <a:spcPts val="1000"/>
+              </a:spcAft>
+              <a:buSzPct val="100000"/>
               <a:buChar char="•"/>
               <a:lnSpc>
                 <a:spcPts val="2200"/>
@@ -24177,10 +24679,12 @@
             </a:r>
           </a:p>
           <a:p>
-            <a:pPr>
-              <a:spcAft>
-                <a:spcPts val="1000"/>
-              </a:spcAft>
+            <a:pPr lvl="0" marL="457200" indent="-228600">
+              <a:buFont typeface="Calibri"/>
+              <a:spcAft>
+                <a:spcPts val="1000"/>
+              </a:spcAft>
+              <a:buSzPct val="100000"/>
               <a:buChar char="•"/>
               <a:lnSpc>
                 <a:spcPts val="2200"/>
@@ -24197,10 +24701,12 @@
             </a:r>
           </a:p>
           <a:p>
-            <a:pPr>
-              <a:spcAft>
-                <a:spcPts val="1000"/>
-              </a:spcAft>
+            <a:pPr lvl="0" marL="457200" indent="-228600">
+              <a:buFont typeface="Calibri"/>
+              <a:spcAft>
+                <a:spcPts val="1000"/>
+              </a:spcAft>
+              <a:buSzPct val="100000"/>
               <a:buChar char="•"/>
               <a:lnSpc>
                 <a:spcPts val="2200"/>
@@ -24217,10 +24723,12 @@
             </a:r>
           </a:p>
           <a:p>
-            <a:pPr>
-              <a:spcAft>
-                <a:spcPts val="1000"/>
-              </a:spcAft>
+            <a:pPr lvl="0" marL="457200" indent="-228600">
+              <a:buFont typeface="Calibri"/>
+              <a:spcAft>
+                <a:spcPts val="1000"/>
+              </a:spcAft>
+              <a:buSzPct val="100000"/>
               <a:buChar char="•"/>
               <a:lnSpc>
                 <a:spcPts val="2200"/>
@@ -24356,10 +24864,12 @@
           </a:bodyPr>
           <a:lstStyle/>
           <a:p>
-            <a:pPr>
-              <a:spcAft>
-                <a:spcPts val="1000"/>
-              </a:spcAft>
+            <a:pPr lvl="0" marL="457200" indent="-228600">
+              <a:buFont typeface="Calibri"/>
+              <a:spcAft>
+                <a:spcPts val="1000"/>
+              </a:spcAft>
+              <a:buSzPct val="100000"/>
               <a:buChar char="•"/>
               <a:lnSpc>
                 <a:spcPts val="2200"/>
@@ -24376,10 +24886,12 @@
             </a:r>
           </a:p>
           <a:p>
-            <a:pPr>
-              <a:spcAft>
-                <a:spcPts val="1000"/>
-              </a:spcAft>
+            <a:pPr lvl="0" marL="457200" indent="-228600">
+              <a:buFont typeface="Calibri"/>
+              <a:spcAft>
+                <a:spcPts val="1000"/>
+              </a:spcAft>
+              <a:buSzPct val="100000"/>
               <a:buChar char="•"/>
               <a:lnSpc>
                 <a:spcPts val="2200"/>
@@ -24396,10 +24908,12 @@
             </a:r>
           </a:p>
           <a:p>
-            <a:pPr>
-              <a:spcAft>
-                <a:spcPts val="1000"/>
-              </a:spcAft>
+            <a:pPr lvl="0" marL="457200" indent="-228600">
+              <a:buFont typeface="Calibri"/>
+              <a:spcAft>
+                <a:spcPts val="1000"/>
+              </a:spcAft>
+              <a:buSzPct val="100000"/>
               <a:buChar char="•"/>
               <a:lnSpc>
                 <a:spcPts val="2200"/>
@@ -24416,10 +24930,12 @@
             </a:r>
           </a:p>
           <a:p>
-            <a:pPr>
-              <a:spcAft>
-                <a:spcPts val="1000"/>
-              </a:spcAft>
+            <a:pPr lvl="0" marL="457200" indent="-228600">
+              <a:buFont typeface="Calibri"/>
+              <a:spcAft>
+                <a:spcPts val="1000"/>
+              </a:spcAft>
+              <a:buSzPct val="100000"/>
               <a:buChar char="•"/>
               <a:lnSpc>
                 <a:spcPts val="2200"/>
@@ -24436,10 +24952,12 @@
             </a:r>
           </a:p>
           <a:p>
-            <a:pPr>
-              <a:spcAft>
-                <a:spcPts val="1000"/>
-              </a:spcAft>
+            <a:pPr lvl="0" marL="457200" indent="-228600">
+              <a:buFont typeface="Calibri"/>
+              <a:spcAft>
+                <a:spcPts val="1000"/>
+              </a:spcAft>
+              <a:buSzPct val="100000"/>
               <a:buChar char="•"/>
               <a:lnSpc>
                 <a:spcPts val="2200"/>
@@ -24456,10 +24974,12 @@
             </a:r>
           </a:p>
           <a:p>
-            <a:pPr>
-              <a:spcAft>
-                <a:spcPts val="1000"/>
-              </a:spcAft>
+            <a:pPr lvl="0" marL="457200" indent="-228600">
+              <a:buFont typeface="Calibri"/>
+              <a:spcAft>
+                <a:spcPts val="1000"/>
+              </a:spcAft>
+              <a:buSzPct val="100000"/>
               <a:buChar char="•"/>
               <a:lnSpc>
                 <a:spcPts val="2200"/>
@@ -24595,10 +25115,12 @@
           </a:bodyPr>
           <a:lstStyle/>
           <a:p>
-            <a:pPr>
-              <a:spcAft>
-                <a:spcPts val="1000"/>
-              </a:spcAft>
+            <a:pPr lvl="0" marL="457200" indent="-228600">
+              <a:buFont typeface="Calibri"/>
+              <a:spcAft>
+                <a:spcPts val="1000"/>
+              </a:spcAft>
+              <a:buSzPct val="100000"/>
               <a:buChar char="•"/>
               <a:lnSpc>
                 <a:spcPts val="2200"/>
@@ -24615,10 +25137,12 @@
             </a:r>
           </a:p>
           <a:p>
-            <a:pPr>
-              <a:spcAft>
-                <a:spcPts val="1000"/>
-              </a:spcAft>
+            <a:pPr lvl="0" marL="457200" indent="-228600">
+              <a:buFont typeface="Calibri"/>
+              <a:spcAft>
+                <a:spcPts val="1000"/>
+              </a:spcAft>
+              <a:buSzPct val="100000"/>
               <a:buChar char="•"/>
               <a:lnSpc>
                 <a:spcPts val="2200"/>
@@ -24635,10 +25159,12 @@
             </a:r>
           </a:p>
           <a:p>
-            <a:pPr>
-              <a:spcAft>
-                <a:spcPts val="1000"/>
-              </a:spcAft>
+            <a:pPr lvl="0" marL="457200" indent="-228600">
+              <a:buFont typeface="Calibri"/>
+              <a:spcAft>
+                <a:spcPts val="1000"/>
+              </a:spcAft>
+              <a:buSzPct val="100000"/>
               <a:buChar char="•"/>
               <a:lnSpc>
                 <a:spcPts val="2200"/>
@@ -24774,10 +25300,12 @@
           </a:bodyPr>
           <a:lstStyle/>
           <a:p>
-            <a:pPr>
-              <a:spcAft>
-                <a:spcPts val="1000"/>
-              </a:spcAft>
+            <a:pPr lvl="0" marL="457200" indent="-228600">
+              <a:buFont typeface="Calibri"/>
+              <a:spcAft>
+                <a:spcPts val="1000"/>
+              </a:spcAft>
+              <a:buSzPct val="100000"/>
               <a:buChar char="•"/>
               <a:lnSpc>
                 <a:spcPts val="2200"/>
@@ -24794,10 +25322,12 @@
             </a:r>
           </a:p>
           <a:p>
-            <a:pPr>
-              <a:spcAft>
-                <a:spcPts val="1000"/>
-              </a:spcAft>
+            <a:pPr lvl="0" marL="457200" indent="-228600">
+              <a:buFont typeface="Calibri"/>
+              <a:spcAft>
+                <a:spcPts val="1000"/>
+              </a:spcAft>
+              <a:buSzPct val="100000"/>
               <a:buChar char="•"/>
               <a:lnSpc>
                 <a:spcPts val="2200"/>
@@ -24814,10 +25344,12 @@
             </a:r>
           </a:p>
           <a:p>
-            <a:pPr>
-              <a:spcAft>
-                <a:spcPts val="1000"/>
-              </a:spcAft>
+            <a:pPr lvl="0" marL="457200" indent="-228600">
+              <a:buFont typeface="Calibri"/>
+              <a:spcAft>
+                <a:spcPts val="1000"/>
+              </a:spcAft>
+              <a:buSzPct val="100000"/>
               <a:buChar char="•"/>
               <a:lnSpc>
                 <a:spcPts val="2200"/>
@@ -24953,10 +25485,12 @@
           </a:bodyPr>
           <a:lstStyle/>
           <a:p>
-            <a:pPr>
-              <a:spcAft>
-                <a:spcPts val="1000"/>
-              </a:spcAft>
+            <a:pPr lvl="0" marL="457200" indent="-228600">
+              <a:buFont typeface="Calibri"/>
+              <a:spcAft>
+                <a:spcPts val="1000"/>
+              </a:spcAft>
+              <a:buSzPct val="100000"/>
               <a:buChar char="•"/>
               <a:lnSpc>
                 <a:spcPts val="2200"/>
@@ -24973,10 +25507,12 @@
             </a:r>
           </a:p>
           <a:p>
-            <a:pPr>
-              <a:spcAft>
-                <a:spcPts val="1000"/>
-              </a:spcAft>
+            <a:pPr lvl="0" marL="457200" indent="-228600">
+              <a:buFont typeface="Calibri"/>
+              <a:spcAft>
+                <a:spcPts val="1000"/>
+              </a:spcAft>
+              <a:buSzPct val="100000"/>
               <a:buChar char="•"/>
               <a:lnSpc>
                 <a:spcPts val="2200"/>
@@ -24993,10 +25529,12 @@
             </a:r>
           </a:p>
           <a:p>
-            <a:pPr>
-              <a:spcAft>
-                <a:spcPts val="1000"/>
-              </a:spcAft>
+            <a:pPr lvl="0" marL="457200" indent="-228600">
+              <a:buFont typeface="Calibri"/>
+              <a:spcAft>
+                <a:spcPts val="1000"/>
+              </a:spcAft>
+              <a:buSzPct val="100000"/>
               <a:buChar char="•"/>
               <a:lnSpc>
                 <a:spcPts val="2200"/>
@@ -25013,10 +25551,12 @@
             </a:r>
           </a:p>
           <a:p>
-            <a:pPr>
-              <a:spcAft>
-                <a:spcPts val="1000"/>
-              </a:spcAft>
+            <a:pPr lvl="0" marL="457200" indent="-228600">
+              <a:buFont typeface="Calibri"/>
+              <a:spcAft>
+                <a:spcPts val="1000"/>
+              </a:spcAft>
+              <a:buSzPct val="100000"/>
               <a:buChar char="•"/>
               <a:lnSpc>
                 <a:spcPts val="2200"/>
@@ -25152,10 +25692,12 @@
           </a:bodyPr>
           <a:lstStyle/>
           <a:p>
-            <a:pPr>
-              <a:spcAft>
-                <a:spcPts val="1000"/>
-              </a:spcAft>
+            <a:pPr lvl="0" marL="457200" indent="-228600">
+              <a:buFont typeface="Calibri"/>
+              <a:spcAft>
+                <a:spcPts val="1000"/>
+              </a:spcAft>
+              <a:buSzPct val="100000"/>
               <a:buChar char="•"/>
               <a:lnSpc>
                 <a:spcPts val="2200"/>
@@ -25172,10 +25714,12 @@
             </a:r>
           </a:p>
           <a:p>
-            <a:pPr>
-              <a:spcAft>
-                <a:spcPts val="1000"/>
-              </a:spcAft>
+            <a:pPr lvl="0" marL="457200" indent="-228600">
+              <a:buFont typeface="Calibri"/>
+              <a:spcAft>
+                <a:spcPts val="1000"/>
+              </a:spcAft>
+              <a:buSzPct val="100000"/>
               <a:buChar char="•"/>
               <a:lnSpc>
                 <a:spcPts val="2200"/>
@@ -25311,10 +25855,12 @@
           </a:bodyPr>
           <a:lstStyle/>
           <a:p>
-            <a:pPr>
-              <a:spcAft>
-                <a:spcPts val="1000"/>
-              </a:spcAft>
+            <a:pPr lvl="0" marL="457200" indent="-228600">
+              <a:buFont typeface="Calibri"/>
+              <a:spcAft>
+                <a:spcPts val="1000"/>
+              </a:spcAft>
+              <a:buSzPct val="100000"/>
               <a:buChar char="•"/>
               <a:lnSpc>
                 <a:spcPts val="2200"/>
@@ -25450,10 +25996,12 @@
           </a:bodyPr>
           <a:lstStyle/>
           <a:p>
-            <a:pPr>
-              <a:spcAft>
-                <a:spcPts val="1000"/>
-              </a:spcAft>
+            <a:pPr lvl="0" marL="457200" indent="-228600">
+              <a:buFont typeface="Calibri"/>
+              <a:spcAft>
+                <a:spcPts val="1000"/>
+              </a:spcAft>
+              <a:buSzPct val="100000"/>
               <a:buChar char="•"/>
               <a:lnSpc>
                 <a:spcPts val="2200"/>
@@ -25470,10 +26018,12 @@
             </a:r>
           </a:p>
           <a:p>
-            <a:pPr>
-              <a:spcAft>
-                <a:spcPts val="1000"/>
-              </a:spcAft>
+            <a:pPr lvl="0" marL="457200" indent="-228600">
+              <a:buFont typeface="Calibri"/>
+              <a:spcAft>
+                <a:spcPts val="1000"/>
+              </a:spcAft>
+              <a:buSzPct val="100000"/>
               <a:buChar char="•"/>
               <a:lnSpc>
                 <a:spcPts val="2200"/>
@@ -25609,10 +26159,12 @@
           </a:bodyPr>
           <a:lstStyle/>
           <a:p>
-            <a:pPr>
-              <a:spcAft>
-                <a:spcPts val="1000"/>
-              </a:spcAft>
+            <a:pPr lvl="0" marL="457200" indent="-228600">
+              <a:buFont typeface="Calibri"/>
+              <a:spcAft>
+                <a:spcPts val="1000"/>
+              </a:spcAft>
+              <a:buSzPct val="100000"/>
               <a:buChar char="•"/>
               <a:lnSpc>
                 <a:spcPts val="2200"/>
@@ -25629,10 +26181,12 @@
             </a:r>
           </a:p>
           <a:p>
-            <a:pPr>
-              <a:spcAft>
-                <a:spcPts val="1000"/>
-              </a:spcAft>
+            <a:pPr lvl="0" marL="457200" indent="-228600">
+              <a:buFont typeface="Calibri"/>
+              <a:spcAft>
+                <a:spcPts val="1000"/>
+              </a:spcAft>
+              <a:buSzPct val="100000"/>
               <a:buChar char="•"/>
               <a:lnSpc>
                 <a:spcPts val="2200"/>
@@ -25649,10 +26203,12 @@
             </a:r>
           </a:p>
           <a:p>
-            <a:pPr>
-              <a:spcAft>
-                <a:spcPts val="1000"/>
-              </a:spcAft>
+            <a:pPr lvl="0" marL="457200" indent="-228600">
+              <a:buFont typeface="Calibri"/>
+              <a:spcAft>
+                <a:spcPts val="1000"/>
+              </a:spcAft>
+              <a:buSzPct val="100000"/>
               <a:buChar char="•"/>
               <a:lnSpc>
                 <a:spcPts val="2200"/>
@@ -25669,10 +26225,12 @@
             </a:r>
           </a:p>
           <a:p>
-            <a:pPr>
-              <a:spcAft>
-                <a:spcPts val="1000"/>
-              </a:spcAft>
+            <a:pPr lvl="0" marL="457200" indent="-228600">
+              <a:buFont typeface="Calibri"/>
+              <a:spcAft>
+                <a:spcPts val="1000"/>
+              </a:spcAft>
+              <a:buSzPct val="100000"/>
               <a:buChar char="•"/>
               <a:lnSpc>
                 <a:spcPts val="2200"/>
@@ -25689,10 +26247,12 @@
             </a:r>
           </a:p>
           <a:p>
-            <a:pPr>
-              <a:spcAft>
-                <a:spcPts val="1000"/>
-              </a:spcAft>
+            <a:pPr lvl="0" marL="457200" indent="-228600">
+              <a:buFont typeface="Calibri"/>
+              <a:spcAft>
+                <a:spcPts val="1000"/>
+              </a:spcAft>
+              <a:buSzPct val="100000"/>
               <a:buChar char="•"/>
               <a:lnSpc>
                 <a:spcPts val="2200"/>
@@ -25828,10 +26388,12 @@
           </a:bodyPr>
           <a:lstStyle/>
           <a:p>
-            <a:pPr>
-              <a:spcAft>
-                <a:spcPts val="1000"/>
-              </a:spcAft>
+            <a:pPr lvl="0" marL="457200" indent="-228600">
+              <a:buFont typeface="Calibri"/>
+              <a:spcAft>
+                <a:spcPts val="1000"/>
+              </a:spcAft>
+              <a:buSzPct val="100000"/>
               <a:buChar char="•"/>
               <a:lnSpc>
                 <a:spcPts val="2200"/>
@@ -25848,10 +26410,12 @@
             </a:r>
           </a:p>
           <a:p>
-            <a:pPr>
-              <a:spcAft>
-                <a:spcPts val="1000"/>
-              </a:spcAft>
+            <a:pPr lvl="0" marL="457200" indent="-228600">
+              <a:buFont typeface="Calibri"/>
+              <a:spcAft>
+                <a:spcPts val="1000"/>
+              </a:spcAft>
+              <a:buSzPct val="100000"/>
               <a:buChar char="•"/>
               <a:lnSpc>
                 <a:spcPts val="2200"/>
@@ -25868,10 +26432,12 @@
             </a:r>
           </a:p>
           <a:p>
-            <a:pPr>
-              <a:spcAft>
-                <a:spcPts val="1000"/>
-              </a:spcAft>
+            <a:pPr lvl="0" marL="457200" indent="-228600">
+              <a:buFont typeface="Calibri"/>
+              <a:spcAft>
+                <a:spcPts val="1000"/>
+              </a:spcAft>
+              <a:buSzPct val="100000"/>
               <a:buChar char="•"/>
               <a:lnSpc>
                 <a:spcPts val="2200"/>
@@ -25888,10 +26454,12 @@
             </a:r>
           </a:p>
           <a:p>
-            <a:pPr>
-              <a:spcAft>
-                <a:spcPts val="1000"/>
-              </a:spcAft>
+            <a:pPr lvl="0" marL="457200" indent="-228600">
+              <a:buFont typeface="Calibri"/>
+              <a:spcAft>
+                <a:spcPts val="1000"/>
+              </a:spcAft>
+              <a:buSzPct val="100000"/>
               <a:buChar char="•"/>
               <a:lnSpc>
                 <a:spcPts val="2200"/>
@@ -25908,10 +26476,12 @@
             </a:r>
           </a:p>
           <a:p>
-            <a:pPr>
-              <a:spcAft>
-                <a:spcPts val="1000"/>
-              </a:spcAft>
+            <a:pPr lvl="0" marL="457200" indent="-228600">
+              <a:buFont typeface="Calibri"/>
+              <a:spcAft>
+                <a:spcPts val="1000"/>
+              </a:spcAft>
+              <a:buSzPct val="100000"/>
               <a:buChar char="•"/>
               <a:lnSpc>
                 <a:spcPts val="2200"/>
@@ -25928,10 +26498,12 @@
             </a:r>
           </a:p>
           <a:p>
-            <a:pPr>
-              <a:spcAft>
-                <a:spcPts val="1000"/>
-              </a:spcAft>
+            <a:pPr lvl="0" marL="457200" indent="-228600">
+              <a:buFont typeface="Calibri"/>
+              <a:spcAft>
+                <a:spcPts val="1000"/>
+              </a:spcAft>
+              <a:buSzPct val="100000"/>
               <a:buChar char="•"/>
               <a:lnSpc>
                 <a:spcPts val="2200"/>
@@ -26067,10 +26639,12 @@
           </a:bodyPr>
           <a:lstStyle/>
           <a:p>
-            <a:pPr>
-              <a:spcAft>
-                <a:spcPts val="1000"/>
-              </a:spcAft>
+            <a:pPr lvl="0" marL="457200" indent="-228600">
+              <a:buFont typeface="Calibri"/>
+              <a:spcAft>
+                <a:spcPts val="1000"/>
+              </a:spcAft>
+              <a:buSzPct val="100000"/>
               <a:buChar char="•"/>
               <a:lnSpc>
                 <a:spcPts val="2200"/>
@@ -26087,10 +26661,12 @@
             </a:r>
           </a:p>
           <a:p>
-            <a:pPr>
-              <a:spcAft>
-                <a:spcPts val="1000"/>
-              </a:spcAft>
+            <a:pPr lvl="0" marL="457200" indent="-228600">
+              <a:buFont typeface="Calibri"/>
+              <a:spcAft>
+                <a:spcPts val="1000"/>
+              </a:spcAft>
+              <a:buSzPct val="100000"/>
               <a:buChar char="•"/>
               <a:lnSpc>
                 <a:spcPts val="2200"/>
@@ -26107,10 +26683,12 @@
             </a:r>
           </a:p>
           <a:p>
-            <a:pPr>
-              <a:spcAft>
-                <a:spcPts val="1000"/>
-              </a:spcAft>
+            <a:pPr lvl="0" marL="457200" indent="-228600">
+              <a:buFont typeface="Calibri"/>
+              <a:spcAft>
+                <a:spcPts val="1000"/>
+              </a:spcAft>
+              <a:buSzPct val="100000"/>
               <a:buChar char="•"/>
               <a:lnSpc>
                 <a:spcPts val="2200"/>
@@ -26127,10 +26705,12 @@
             </a:r>
           </a:p>
           <a:p>
-            <a:pPr>
-              <a:spcAft>
-                <a:spcPts val="1000"/>
-              </a:spcAft>
+            <a:pPr lvl="0" marL="457200" indent="-228600">
+              <a:buFont typeface="Calibri"/>
+              <a:spcAft>
+                <a:spcPts val="1000"/>
+              </a:spcAft>
+              <a:buSzPct val="100000"/>
               <a:buChar char="•"/>
               <a:lnSpc>
                 <a:spcPts val="2200"/>
@@ -26147,10 +26727,12 @@
             </a:r>
           </a:p>
           <a:p>
-            <a:pPr>
-              <a:spcAft>
-                <a:spcPts val="1000"/>
-              </a:spcAft>
+            <a:pPr lvl="0" marL="457200" indent="-228600">
+              <a:buFont typeface="Calibri"/>
+              <a:spcAft>
+                <a:spcPts val="1000"/>
+              </a:spcAft>
+              <a:buSzPct val="100000"/>
               <a:buChar char="•"/>
               <a:lnSpc>
                 <a:spcPts val="2200"/>
@@ -26167,10 +26749,12 @@
             </a:r>
           </a:p>
           <a:p>
-            <a:pPr>
-              <a:spcAft>
-                <a:spcPts val="1000"/>
-              </a:spcAft>
+            <a:pPr lvl="0" marL="457200" indent="-228600">
+              <a:buFont typeface="Calibri"/>
+              <a:spcAft>
+                <a:spcPts val="1000"/>
+              </a:spcAft>
+              <a:buSzPct val="100000"/>
               <a:buChar char="•"/>
               <a:lnSpc>
                 <a:spcPts val="2200"/>
@@ -26306,10 +26890,12 @@
           </a:bodyPr>
           <a:lstStyle/>
           <a:p>
-            <a:pPr>
-              <a:spcAft>
-                <a:spcPts val="1000"/>
-              </a:spcAft>
+            <a:pPr lvl="0" marL="457200" indent="-228600">
+              <a:buFont typeface="Calibri"/>
+              <a:spcAft>
+                <a:spcPts val="1000"/>
+              </a:spcAft>
+              <a:buSzPct val="100000"/>
               <a:buChar char="•"/>
               <a:lnSpc>
                 <a:spcPts val="2200"/>
@@ -26326,10 +26912,12 @@
             </a:r>
           </a:p>
           <a:p>
-            <a:pPr>
-              <a:spcAft>
-                <a:spcPts val="1000"/>
-              </a:spcAft>
+            <a:pPr lvl="0" marL="457200" indent="-228600">
+              <a:buFont typeface="Calibri"/>
+              <a:spcAft>
+                <a:spcPts val="1000"/>
+              </a:spcAft>
+              <a:buSzPct val="100000"/>
               <a:buChar char="•"/>
               <a:lnSpc>
                 <a:spcPts val="2200"/>
@@ -26346,10 +26934,12 @@
             </a:r>
           </a:p>
           <a:p>
-            <a:pPr>
-              <a:spcAft>
-                <a:spcPts val="1000"/>
-              </a:spcAft>
+            <a:pPr lvl="0" marL="457200" indent="-228600">
+              <a:buFont typeface="Calibri"/>
+              <a:spcAft>
+                <a:spcPts val="1000"/>
+              </a:spcAft>
+              <a:buSzPct val="100000"/>
               <a:buChar char="•"/>
               <a:lnSpc>
                 <a:spcPts val="2200"/>
@@ -26366,10 +26956,12 @@
             </a:r>
           </a:p>
           <a:p>
-            <a:pPr>
-              <a:spcAft>
-                <a:spcPts val="1000"/>
-              </a:spcAft>
+            <a:pPr lvl="0" marL="457200" indent="-228600">
+              <a:buFont typeface="Calibri"/>
+              <a:spcAft>
+                <a:spcPts val="1000"/>
+              </a:spcAft>
+              <a:buSzPct val="100000"/>
               <a:buChar char="•"/>
               <a:lnSpc>
                 <a:spcPts val="2200"/>
@@ -26386,10 +26978,12 @@
             </a:r>
           </a:p>
           <a:p>
-            <a:pPr>
-              <a:spcAft>
-                <a:spcPts val="1000"/>
-              </a:spcAft>
+            <a:pPr lvl="0" marL="457200" indent="-228600">
+              <a:buFont typeface="Calibri"/>
+              <a:spcAft>
+                <a:spcPts val="1000"/>
+              </a:spcAft>
+              <a:buSzPct val="100000"/>
               <a:buChar char="•"/>
               <a:lnSpc>
                 <a:spcPts val="2200"/>
@@ -26525,10 +27119,12 @@
           </a:bodyPr>
           <a:lstStyle/>
           <a:p>
-            <a:pPr>
-              <a:spcAft>
-                <a:spcPts val="1000"/>
-              </a:spcAft>
+            <a:pPr lvl="0" marL="457200" indent="-228600">
+              <a:buFont typeface="Calibri"/>
+              <a:spcAft>
+                <a:spcPts val="1000"/>
+              </a:spcAft>
+              <a:buSzPct val="100000"/>
               <a:buChar char="•"/>
               <a:lnSpc>
                 <a:spcPts val="2200"/>
@@ -26545,10 +27141,12 @@
             </a:r>
           </a:p>
           <a:p>
-            <a:pPr>
-              <a:spcAft>
-                <a:spcPts val="1000"/>
-              </a:spcAft>
+            <a:pPr lvl="0" marL="457200" indent="-228600">
+              <a:buFont typeface="Calibri"/>
+              <a:spcAft>
+                <a:spcPts val="1000"/>
+              </a:spcAft>
+              <a:buSzPct val="100000"/>
               <a:buChar char="•"/>
               <a:lnSpc>
                 <a:spcPts val="2200"/>
@@ -26565,10 +27163,12 @@
             </a:r>
           </a:p>
           <a:p>
-            <a:pPr>
-              <a:spcAft>
-                <a:spcPts val="1000"/>
-              </a:spcAft>
+            <a:pPr lvl="0" marL="457200" indent="-228600">
+              <a:buFont typeface="Calibri"/>
+              <a:spcAft>
+                <a:spcPts val="1000"/>
+              </a:spcAft>
+              <a:buSzPct val="100000"/>
               <a:buChar char="•"/>
               <a:lnSpc>
                 <a:spcPts val="2200"/>
@@ -26704,10 +27304,12 @@
           </a:bodyPr>
           <a:lstStyle/>
           <a:p>
-            <a:pPr>
-              <a:spcAft>
-                <a:spcPts val="1000"/>
-              </a:spcAft>
+            <a:pPr lvl="0" marL="457200" indent="-228600">
+              <a:buFont typeface="Calibri"/>
+              <a:spcAft>
+                <a:spcPts val="1000"/>
+              </a:spcAft>
+              <a:buSzPct val="100000"/>
               <a:buChar char="•"/>
               <a:lnSpc>
                 <a:spcPts val="2200"/>
@@ -26724,10 +27326,12 @@
             </a:r>
           </a:p>
           <a:p>
-            <a:pPr>
-              <a:spcAft>
-                <a:spcPts val="1000"/>
-              </a:spcAft>
+            <a:pPr lvl="0" marL="457200" indent="-228600">
+              <a:buFont typeface="Calibri"/>
+              <a:spcAft>
+                <a:spcPts val="1000"/>
+              </a:spcAft>
+              <a:buSzPct val="100000"/>
               <a:buChar char="•"/>
               <a:lnSpc>
                 <a:spcPts val="2200"/>
@@ -26744,10 +27348,12 @@
             </a:r>
           </a:p>
           <a:p>
-            <a:pPr>
-              <a:spcAft>
-                <a:spcPts val="1000"/>
-              </a:spcAft>
+            <a:pPr lvl="0" marL="457200" indent="-228600">
+              <a:buFont typeface="Calibri"/>
+              <a:spcAft>
+                <a:spcPts val="1000"/>
+              </a:spcAft>
+              <a:buSzPct val="100000"/>
               <a:buChar char="•"/>
               <a:lnSpc>
                 <a:spcPts val="2200"/>
@@ -26764,10 +27370,12 @@
             </a:r>
           </a:p>
           <a:p>
-            <a:pPr>
-              <a:spcAft>
-                <a:spcPts val="1000"/>
-              </a:spcAft>
+            <a:pPr lvl="0" marL="457200" indent="-228600">
+              <a:buFont typeface="Calibri"/>
+              <a:spcAft>
+                <a:spcPts val="1000"/>
+              </a:spcAft>
+              <a:buSzPct val="100000"/>
               <a:buChar char="•"/>
               <a:lnSpc>
                 <a:spcPts val="2200"/>
@@ -26903,10 +27511,12 @@
           </a:bodyPr>
           <a:lstStyle/>
           <a:p>
-            <a:pPr>
-              <a:spcAft>
-                <a:spcPts val="1000"/>
-              </a:spcAft>
+            <a:pPr lvl="0" marL="457200" indent="-228600">
+              <a:buFont typeface="Calibri"/>
+              <a:spcAft>
+                <a:spcPts val="1000"/>
+              </a:spcAft>
+              <a:buSzPct val="100000"/>
               <a:buChar char="•"/>
               <a:lnSpc>
                 <a:spcPts val="2200"/>
@@ -26923,10 +27533,12 @@
             </a:r>
           </a:p>
           <a:p>
-            <a:pPr>
-              <a:spcAft>
-                <a:spcPts val="1000"/>
-              </a:spcAft>
+            <a:pPr lvl="0" marL="457200" indent="-228600">
+              <a:buFont typeface="Calibri"/>
+              <a:spcAft>
+                <a:spcPts val="1000"/>
+              </a:spcAft>
+              <a:buSzPct val="100000"/>
               <a:buChar char="•"/>
               <a:lnSpc>
                 <a:spcPts val="2200"/>
@@ -26943,10 +27555,12 @@
             </a:r>
           </a:p>
           <a:p>
-            <a:pPr>
-              <a:spcAft>
-                <a:spcPts val="1000"/>
-              </a:spcAft>
+            <a:pPr lvl="0" marL="457200" indent="-228600">
+              <a:buFont typeface="Calibri"/>
+              <a:spcAft>
+                <a:spcPts val="1000"/>
+              </a:spcAft>
+              <a:buSzPct val="100000"/>
               <a:buChar char="•"/>
               <a:lnSpc>
                 <a:spcPts val="2200"/>
@@ -26963,10 +27577,12 @@
             </a:r>
           </a:p>
           <a:p>
-            <a:pPr>
-              <a:spcAft>
-                <a:spcPts val="1000"/>
-              </a:spcAft>
+            <a:pPr lvl="0" marL="457200" indent="-228600">
+              <a:buFont typeface="Calibri"/>
+              <a:spcAft>
+                <a:spcPts val="1000"/>
+              </a:spcAft>
+              <a:buSzPct val="100000"/>
               <a:buChar char="•"/>
               <a:lnSpc>
                 <a:spcPts val="2200"/>
@@ -26983,10 +27599,12 @@
             </a:r>
           </a:p>
           <a:p>
-            <a:pPr>
-              <a:spcAft>
-                <a:spcPts val="1000"/>
-              </a:spcAft>
+            <a:pPr lvl="0" marL="457200" indent="-228600">
+              <a:buFont typeface="Calibri"/>
+              <a:spcAft>
+                <a:spcPts val="1000"/>
+              </a:spcAft>
+              <a:buSzPct val="100000"/>
               <a:buChar char="•"/>
               <a:lnSpc>
                 <a:spcPts val="2200"/>
@@ -27122,10 +27740,12 @@
           </a:bodyPr>
           <a:lstStyle/>
           <a:p>
-            <a:pPr>
-              <a:spcAft>
-                <a:spcPts val="1000"/>
-              </a:spcAft>
+            <a:pPr lvl="0" marL="457200" indent="-228600">
+              <a:buFont typeface="Calibri"/>
+              <a:spcAft>
+                <a:spcPts val="1000"/>
+              </a:spcAft>
+              <a:buSzPct val="100000"/>
               <a:buChar char="•"/>
               <a:lnSpc>
                 <a:spcPts val="2200"/>
@@ -27142,10 +27762,12 @@
             </a:r>
           </a:p>
           <a:p>
-            <a:pPr>
-              <a:spcAft>
-                <a:spcPts val="1000"/>
-              </a:spcAft>
+            <a:pPr lvl="0" marL="457200" indent="-228600">
+              <a:buFont typeface="Calibri"/>
+              <a:spcAft>
+                <a:spcPts val="1000"/>
+              </a:spcAft>
+              <a:buSzPct val="100000"/>
               <a:buChar char="•"/>
               <a:lnSpc>
                 <a:spcPts val="2200"/>
